--- a/Presentasi_AI_CV_Screening_Specialist.pptx
+++ b/Presentasi_AI_CV_Screening_Specialist.pptx
@@ -17,6 +17,7 @@
     <p:sldId id="265" r:id="rId16"/>
     <p:sldId id="266" r:id="rId17"/>
     <p:sldId id="267" r:id="rId18"/>
+    <p:sldId id="268" r:id="rId19"/>
   </p:sldIdLst>
   <p:sldSz cx="12191695" cy="6858000" type="screen4x3"/>
   <p:notesSz cx="6858000" cy="9144000"/>
@@ -3454,7 +3455,7 @@
               </a:defRPr>
             </a:pPr>
             <a:r>
-              <a:t>Demonstrasi Proof of Concept (PoC) &amp; Validasi Hasil Uji</a:t>
+              <a:t>Analisis Efisiensi, Reduksi Biaya, &amp; Dampak Bisnis (ROI)</a:t>
             </a:r>
           </a:p>
         </p:txBody>
@@ -3511,7 +3512,447 @@
         <p:spPr>
           <a:xfrm>
             <a:off x="731520" y="1645920"/>
-            <a:ext cx="5212080" cy="4572000"/>
+            <a:ext cx="2606040" cy="2011680"/>
+          </a:xfrm>
+          <a:prstGeom prst="roundRect">
+            <a:avLst/>
+          </a:prstGeom>
+          <a:solidFill>
+            <a:srgbClr val="E0F2FE"/>
+          </a:solidFill>
+          <a:ln w="12700">
+            <a:solidFill>
+              <a:srgbClr val="0EA5E9"/>
+            </a:solidFill>
+          </a:ln>
+        </p:spPr>
+        <p:style>
+          <a:lnRef idx="1">
+            <a:schemeClr val="accent1"/>
+          </a:lnRef>
+          <a:fillRef idx="3">
+            <a:schemeClr val="accent1"/>
+          </a:fillRef>
+          <a:effectRef idx="2">
+            <a:schemeClr val="accent1"/>
+          </a:effectRef>
+          <a:fontRef idx="minor">
+            <a:schemeClr val="lt1"/>
+          </a:fontRef>
+        </p:style>
+        <p:txBody>
+          <a:bodyPr rtlCol="0" anchor="ctr"/>
+          <a:lstStyle/>
+          <a:p>
+            <a:pPr algn="ctr"/>
+          </a:p>
+        </p:txBody>
+      </p:sp>
+      <p:sp>
+        <p:nvSpPr>
+          <p:cNvPr id="7" name="TextBox 6"/>
+          <p:cNvSpPr txBox="1"/>
+          <p:nvPr/>
+        </p:nvSpPr>
+        <p:spPr>
+          <a:xfrm>
+            <a:off x="868680" y="1737360"/>
+            <a:ext cx="2331720" cy="1828800"/>
+          </a:xfrm>
+          <a:prstGeom prst="rect">
+            <a:avLst/>
+          </a:prstGeom>
+          <a:noFill/>
+        </p:spPr>
+        <p:txBody>
+          <a:bodyPr wrap="square">
+            <a:spAutoFit/>
+          </a:bodyPr>
+          <a:lstStyle/>
+          <a:p>
+            <a:pPr>
+              <a:defRPr sz="3200" b="1">
+                <a:solidFill>
+                  <a:srgbClr val="0369A1"/>
+                </a:solidFill>
+              </a:defRPr>
+            </a:pPr>
+            <a:r>
+              <a:t>95%</a:t>
+            </a:r>
+          </a:p>
+          <a:p>
+            <a:pPr>
+              <a:spcBef>
+                <a:spcPts val="400"/>
+              </a:spcBef>
+              <a:defRPr sz="1300" b="1">
+                <a:solidFill>
+                  <a:srgbClr val="0F172A"/>
+                </a:solidFill>
+              </a:defRPr>
+            </a:pPr>
+            <a:r>
+              <a:t>Efisiensi Waktu</a:t>
+            </a:r>
+          </a:p>
+          <a:p>
+            <a:pPr>
+              <a:spcBef>
+                <a:spcPts val="400"/>
+              </a:spcBef>
+              <a:defRPr sz="1000">
+                <a:solidFill>
+                  <a:srgbClr val="64748B"/>
+                </a:solidFill>
+              </a:defRPr>
+            </a:pPr>
+            <a:r>
+              <a:t>Screening 1.000 CV turun dari 50 jam kerja menjadi &lt; 15 menit pemrosesan otomatis.</a:t>
+            </a:r>
+          </a:p>
+        </p:txBody>
+      </p:sp>
+      <p:sp>
+        <p:nvSpPr>
+          <p:cNvPr id="8" name="Rounded Rectangle 7"/>
+          <p:cNvSpPr/>
+          <p:nvPr/>
+        </p:nvSpPr>
+        <p:spPr>
+          <a:xfrm>
+            <a:off x="3429000" y="1645920"/>
+            <a:ext cx="2606040" cy="2011680"/>
+          </a:xfrm>
+          <a:prstGeom prst="roundRect">
+            <a:avLst/>
+          </a:prstGeom>
+          <a:solidFill>
+            <a:srgbClr val="E0F2FE"/>
+          </a:solidFill>
+          <a:ln w="12700">
+            <a:solidFill>
+              <a:srgbClr val="0EA5E9"/>
+            </a:solidFill>
+          </a:ln>
+        </p:spPr>
+        <p:style>
+          <a:lnRef idx="1">
+            <a:schemeClr val="accent1"/>
+          </a:lnRef>
+          <a:fillRef idx="3">
+            <a:schemeClr val="accent1"/>
+          </a:fillRef>
+          <a:effectRef idx="2">
+            <a:schemeClr val="accent1"/>
+          </a:effectRef>
+          <a:fontRef idx="minor">
+            <a:schemeClr val="lt1"/>
+          </a:fontRef>
+        </p:style>
+        <p:txBody>
+          <a:bodyPr rtlCol="0" anchor="ctr"/>
+          <a:lstStyle/>
+          <a:p>
+            <a:pPr algn="ctr"/>
+          </a:p>
+        </p:txBody>
+      </p:sp>
+      <p:sp>
+        <p:nvSpPr>
+          <p:cNvPr id="9" name="TextBox 8"/>
+          <p:cNvSpPr txBox="1"/>
+          <p:nvPr/>
+        </p:nvSpPr>
+        <p:spPr>
+          <a:xfrm>
+            <a:off x="3566160" y="1737360"/>
+            <a:ext cx="2331720" cy="1828800"/>
+          </a:xfrm>
+          <a:prstGeom prst="rect">
+            <a:avLst/>
+          </a:prstGeom>
+          <a:noFill/>
+        </p:spPr>
+        <p:txBody>
+          <a:bodyPr wrap="square">
+            <a:spAutoFit/>
+          </a:bodyPr>
+          <a:lstStyle/>
+          <a:p>
+            <a:pPr>
+              <a:defRPr sz="3200" b="1">
+                <a:solidFill>
+                  <a:srgbClr val="0369A1"/>
+                </a:solidFill>
+              </a:defRPr>
+            </a:pPr>
+            <a:r>
+              <a:t>75%</a:t>
+            </a:r>
+          </a:p>
+          <a:p>
+            <a:pPr>
+              <a:spcBef>
+                <a:spcPts val="400"/>
+              </a:spcBef>
+              <a:defRPr sz="1300" b="1">
+                <a:solidFill>
+                  <a:srgbClr val="0F172A"/>
+                </a:solidFill>
+              </a:defRPr>
+            </a:pPr>
+            <a:r>
+              <a:t>Penghematan Biaya</a:t>
+            </a:r>
+          </a:p>
+          <a:p>
+            <a:pPr>
+              <a:spcBef>
+                <a:spcPts val="400"/>
+              </a:spcBef>
+              <a:defRPr sz="1000">
+                <a:solidFill>
+                  <a:srgbClr val="64748B"/>
+                </a:solidFill>
+              </a:defRPr>
+            </a:pPr>
+            <a:r>
+              <a:t>Mengurangi biaya lembur rekruter &amp; mengeliminasi ketergantungan pada agensi rekrutmen pihak ketiga.</a:t>
+            </a:r>
+          </a:p>
+        </p:txBody>
+      </p:sp>
+      <p:sp>
+        <p:nvSpPr>
+          <p:cNvPr id="10" name="Rounded Rectangle 9"/>
+          <p:cNvSpPr/>
+          <p:nvPr/>
+        </p:nvSpPr>
+        <p:spPr>
+          <a:xfrm>
+            <a:off x="6126480" y="1645920"/>
+            <a:ext cx="2606040" cy="2011680"/>
+          </a:xfrm>
+          <a:prstGeom prst="roundRect">
+            <a:avLst/>
+          </a:prstGeom>
+          <a:solidFill>
+            <a:srgbClr val="E0F2FE"/>
+          </a:solidFill>
+          <a:ln w="12700">
+            <a:solidFill>
+              <a:srgbClr val="0EA5E9"/>
+            </a:solidFill>
+          </a:ln>
+        </p:spPr>
+        <p:style>
+          <a:lnRef idx="1">
+            <a:schemeClr val="accent1"/>
+          </a:lnRef>
+          <a:fillRef idx="3">
+            <a:schemeClr val="accent1"/>
+          </a:fillRef>
+          <a:effectRef idx="2">
+            <a:schemeClr val="accent1"/>
+          </a:effectRef>
+          <a:fontRef idx="minor">
+            <a:schemeClr val="lt1"/>
+          </a:fontRef>
+        </p:style>
+        <p:txBody>
+          <a:bodyPr rtlCol="0" anchor="ctr"/>
+          <a:lstStyle/>
+          <a:p>
+            <a:pPr algn="ctr"/>
+          </a:p>
+        </p:txBody>
+      </p:sp>
+      <p:sp>
+        <p:nvSpPr>
+          <p:cNvPr id="11" name="TextBox 10"/>
+          <p:cNvSpPr txBox="1"/>
+          <p:nvPr/>
+        </p:nvSpPr>
+        <p:spPr>
+          <a:xfrm>
+            <a:off x="6263640" y="1737360"/>
+            <a:ext cx="2331720" cy="1828800"/>
+          </a:xfrm>
+          <a:prstGeom prst="rect">
+            <a:avLst/>
+          </a:prstGeom>
+          <a:noFill/>
+        </p:spPr>
+        <p:txBody>
+          <a:bodyPr wrap="square">
+            <a:spAutoFit/>
+          </a:bodyPr>
+          <a:lstStyle/>
+          <a:p>
+            <a:pPr>
+              <a:defRPr sz="3200" b="1">
+                <a:solidFill>
+                  <a:srgbClr val="0369A1"/>
+                </a:solidFill>
+              </a:defRPr>
+            </a:pPr>
+            <a:r>
+              <a:t>3 Hari</a:t>
+            </a:r>
+          </a:p>
+          <a:p>
+            <a:pPr>
+              <a:spcBef>
+                <a:spcPts val="400"/>
+              </a:spcBef>
+              <a:defRPr sz="1300" b="1">
+                <a:solidFill>
+                  <a:srgbClr val="0F172A"/>
+                </a:solidFill>
+              </a:defRPr>
+            </a:pPr>
+            <a:r>
+              <a:t>Time-to-Hire</a:t>
+            </a:r>
+          </a:p>
+          <a:p>
+            <a:pPr>
+              <a:spcBef>
+                <a:spcPts val="400"/>
+              </a:spcBef>
+              <a:defRPr sz="1000">
+                <a:solidFill>
+                  <a:srgbClr val="64748B"/>
+                </a:solidFill>
+              </a:defRPr>
+            </a:pPr>
+            <a:r>
+              <a:t>Memangkas siklus dari rata-rata 21-25 hari menjadi 3-5 hari siap wawancara.</a:t>
+            </a:r>
+          </a:p>
+        </p:txBody>
+      </p:sp>
+      <p:sp>
+        <p:nvSpPr>
+          <p:cNvPr id="12" name="Rounded Rectangle 11"/>
+          <p:cNvSpPr/>
+          <p:nvPr/>
+        </p:nvSpPr>
+        <p:spPr>
+          <a:xfrm>
+            <a:off x="8823960" y="1645920"/>
+            <a:ext cx="2606040" cy="2011680"/>
+          </a:xfrm>
+          <a:prstGeom prst="roundRect">
+            <a:avLst/>
+          </a:prstGeom>
+          <a:solidFill>
+            <a:srgbClr val="E0F2FE"/>
+          </a:solidFill>
+          <a:ln w="12700">
+            <a:solidFill>
+              <a:srgbClr val="0EA5E9"/>
+            </a:solidFill>
+          </a:ln>
+        </p:spPr>
+        <p:style>
+          <a:lnRef idx="1">
+            <a:schemeClr val="accent1"/>
+          </a:lnRef>
+          <a:fillRef idx="3">
+            <a:schemeClr val="accent1"/>
+          </a:fillRef>
+          <a:effectRef idx="2">
+            <a:schemeClr val="accent1"/>
+          </a:effectRef>
+          <a:fontRef idx="minor">
+            <a:schemeClr val="lt1"/>
+          </a:fontRef>
+        </p:style>
+        <p:txBody>
+          <a:bodyPr rtlCol="0" anchor="ctr"/>
+          <a:lstStyle/>
+          <a:p>
+            <a:pPr algn="ctr"/>
+          </a:p>
+        </p:txBody>
+      </p:sp>
+      <p:sp>
+        <p:nvSpPr>
+          <p:cNvPr id="13" name="TextBox 12"/>
+          <p:cNvSpPr txBox="1"/>
+          <p:nvPr/>
+        </p:nvSpPr>
+        <p:spPr>
+          <a:xfrm>
+            <a:off x="8961120" y="1737360"/>
+            <a:ext cx="2331720" cy="1828800"/>
+          </a:xfrm>
+          <a:prstGeom prst="rect">
+            <a:avLst/>
+          </a:prstGeom>
+          <a:noFill/>
+        </p:spPr>
+        <p:txBody>
+          <a:bodyPr wrap="square">
+            <a:spAutoFit/>
+          </a:bodyPr>
+          <a:lstStyle/>
+          <a:p>
+            <a:pPr>
+              <a:defRPr sz="3200" b="1">
+                <a:solidFill>
+                  <a:srgbClr val="0369A1"/>
+                </a:solidFill>
+              </a:defRPr>
+            </a:pPr>
+            <a:r>
+              <a:t>100%</a:t>
+            </a:r>
+          </a:p>
+          <a:p>
+            <a:pPr>
+              <a:spcBef>
+                <a:spcPts val="400"/>
+              </a:spcBef>
+              <a:defRPr sz="1300" b="1">
+                <a:solidFill>
+                  <a:srgbClr val="0F172A"/>
+                </a:solidFill>
+              </a:defRPr>
+            </a:pPr>
+            <a:r>
+              <a:t>Objektivitas &amp; Konsistensi</a:t>
+            </a:r>
+          </a:p>
+          <a:p>
+            <a:pPr>
+              <a:spcBef>
+                <a:spcPts val="400"/>
+              </a:spcBef>
+              <a:defRPr sz="1000">
+                <a:solidFill>
+                  <a:srgbClr val="64748B"/>
+                </a:solidFill>
+              </a:defRPr>
+            </a:pPr>
+            <a:r>
+              <a:t>Standardisasi evaluasi bebas bias lelah shift kerja dan subjektivitas manusia.</a:t>
+            </a:r>
+          </a:p>
+        </p:txBody>
+      </p:sp>
+      <p:sp>
+        <p:nvSpPr>
+          <p:cNvPr id="14" name="Rounded Rectangle 13"/>
+          <p:cNvSpPr/>
+          <p:nvPr/>
+        </p:nvSpPr>
+        <p:spPr>
+          <a:xfrm>
+            <a:off x="731520" y="3931920"/>
+            <a:ext cx="10698480" cy="2286000"/>
           </a:xfrm>
           <a:prstGeom prst="roundRect">
             <a:avLst/>
@@ -3549,14 +3990,14 @@
       </p:sp>
       <p:sp>
         <p:nvSpPr>
-          <p:cNvPr id="7" name="TextBox 6"/>
+          <p:cNvPr id="15" name="TextBox 14"/>
           <p:cNvSpPr txBox="1"/>
           <p:nvPr/>
         </p:nvSpPr>
         <p:spPr>
           <a:xfrm>
-            <a:off x="1005840" y="1828800"/>
-            <a:ext cx="4663440" cy="4114800"/>
+            <a:off x="1005840" y="4114800"/>
+            <a:ext cx="10149840" cy="1920240"/>
           </a:xfrm>
           <a:prstGeom prst="rect">
             <a:avLst/>
@@ -3571,22 +4012,22 @@
           <a:p>
             <a:pPr>
               <a:spcAft>
-                <a:spcPts val="1000"/>
+                <a:spcPts val="800"/>
               </a:spcAft>
-              <a:defRPr sz="1600" b="1">
+              <a:defRPr sz="1400" b="1">
                 <a:solidFill>
                   <a:srgbClr val="0F172A"/>
                 </a:solidFill>
               </a:defRPr>
             </a:pPr>
             <a:r>
-              <a:t>Fitur Utama PoC (Streamlit + Gemini)</a:t>
-            </a:r>
-          </a:p>
-          <a:p>
-            <a:pPr>
-              <a:spcBef>
-                <a:spcPts val="600"/>
+              <a:t>Perbandingan Sebelum vs Sesudah Implementasi AI CV Screening</a:t>
+            </a:r>
+          </a:p>
+          <a:p>
+            <a:pPr>
+              <a:spcBef>
+                <a:spcPts val="400"/>
               </a:spcBef>
               <a:defRPr sz="1100">
                 <a:solidFill>
@@ -3595,13 +4036,13 @@
               </a:defRPr>
             </a:pPr>
             <a:r>
-              <a:t>✔  1. Dynamic Job Presets: Template siap pakai untuk Plant CAD Drafter &amp; Backend Engineer Pabrik.</a:t>
-            </a:r>
-          </a:p>
-          <a:p>
-            <a:pPr>
-              <a:spcBef>
-                <a:spcPts val="600"/>
+              <a:t>• Kapasitas Screening: Maksimal 150-200 CV per hari per recruiter  ➔  Ribuan CV diproses secara simultan dalam hitungan menit</a:t>
+            </a:r>
+          </a:p>
+          <a:p>
+            <a:pPr>
+              <a:spcBef>
+                <a:spcPts val="400"/>
               </a:spcBef>
               <a:defRPr sz="1100">
                 <a:solidFill>
@@ -3610,13 +4051,13 @@
               </a:defRPr>
             </a:pPr>
             <a:r>
-              <a:t>✔  2. One-Click Demo: Tombol pengujian langsung terhadap 5 CV sampel anonim bawaan.</a:t>
-            </a:r>
-          </a:p>
-          <a:p>
-            <a:pPr>
-              <a:spcBef>
-                <a:spcPts val="600"/>
+              <a:t>• Risiko Bias Manusia: Tinggi (terpengaruh foto, gender, nama, almamater)  ➔  Nol pada tahap AI (Blind Screening berbasis kompetensi)</a:t>
+            </a:r>
+          </a:p>
+          <a:p>
+            <a:pPr>
+              <a:spcBef>
+                <a:spcPts val="400"/>
               </a:spcBef>
               <a:defRPr sz="1100">
                 <a:solidFill>
@@ -3625,13 +4066,13 @@
               </a:defRPr>
             </a:pPr>
             <a:r>
-              <a:t>✔  3. Multi-Format Ingestion: Ekstraksi teks otomatis dari file PDF &amp; tabel DOCX.</a:t>
-            </a:r>
-          </a:p>
-          <a:p>
-            <a:pPr>
-              <a:spcBef>
-                <a:spcPts val="600"/>
+              <a:t>• Auditability &amp; Keterbukaan: Subjektif, tidak ada rekaman alasan penolakan detail  ➔  100% transparan dengan Strengths, Gaps, dan Reasoning</a:t>
+            </a:r>
+          </a:p>
+          <a:p>
+            <a:pPr>
+              <a:spcBef>
+                <a:spcPts val="400"/>
               </a:spcBef>
               <a:defRPr sz="1100">
                 <a:solidFill>
@@ -3640,255 +4081,7 @@
               </a:defRPr>
             </a:pPr>
             <a:r>
-              <a:t>✔  4. Strict Blind Isolation: PII disensor ketat sebelum proses scoring semantik.</a:t>
-            </a:r>
-          </a:p>
-          <a:p>
-            <a:pPr>
-              <a:spcBef>
-                <a:spcPts val="600"/>
-              </a:spcBef>
-              <a:defRPr sz="1100">
-                <a:solidFill>
-                  <a:srgbClr val="64748B"/>
-                </a:solidFill>
-              </a:defRPr>
-            </a:pPr>
-            <a:r>
-              <a:t>✔  5. Metrik Dashboard: Total pelamar, rasio lolos hard filter, dan rata-rata skor.</a:t>
-            </a:r>
-          </a:p>
-          <a:p>
-            <a:pPr>
-              <a:spcBef>
-                <a:spcPts val="600"/>
-              </a:spcBef>
-              <a:defRPr sz="1100">
-                <a:solidFill>
-                  <a:srgbClr val="64748B"/>
-                </a:solidFill>
-              </a:defRPr>
-            </a:pPr>
-            <a:r>
-              <a:t>✔  6. Audit Trail &amp; CSV Export: Detail kekuatan/kelemahan per kandidat siap diunduh tim HR.</a:t>
-            </a:r>
-          </a:p>
-        </p:txBody>
-      </p:sp>
-      <p:sp>
-        <p:nvSpPr>
-          <p:cNvPr id="8" name="Rounded Rectangle 7"/>
-          <p:cNvSpPr/>
-          <p:nvPr/>
-        </p:nvSpPr>
-        <p:spPr>
-          <a:xfrm>
-            <a:off x="6217920" y="1645920"/>
-            <a:ext cx="5212080" cy="4572000"/>
-          </a:xfrm>
-          <a:prstGeom prst="roundRect">
-            <a:avLst/>
-          </a:prstGeom>
-          <a:solidFill>
-            <a:srgbClr val="F8FAFC"/>
-          </a:solidFill>
-          <a:ln w="12700">
-            <a:solidFill>
-              <a:srgbClr val="E2E8F0"/>
-            </a:solidFill>
-          </a:ln>
-        </p:spPr>
-        <p:style>
-          <a:lnRef idx="1">
-            <a:schemeClr val="accent1"/>
-          </a:lnRef>
-          <a:fillRef idx="3">
-            <a:schemeClr val="accent1"/>
-          </a:fillRef>
-          <a:effectRef idx="2">
-            <a:schemeClr val="accent1"/>
-          </a:effectRef>
-          <a:fontRef idx="minor">
-            <a:schemeClr val="lt1"/>
-          </a:fontRef>
-        </p:style>
-        <p:txBody>
-          <a:bodyPr rtlCol="0" anchor="ctr"/>
-          <a:lstStyle/>
-          <a:p>
-            <a:pPr algn="ctr"/>
-          </a:p>
-        </p:txBody>
-      </p:sp>
-      <p:sp>
-        <p:nvSpPr>
-          <p:cNvPr id="9" name="TextBox 8"/>
-          <p:cNvSpPr txBox="1"/>
-          <p:nvPr/>
-        </p:nvSpPr>
-        <p:spPr>
-          <a:xfrm>
-            <a:off x="6492240" y="1828800"/>
-            <a:ext cx="4663440" cy="4114800"/>
-          </a:xfrm>
-          <a:prstGeom prst="rect">
-            <a:avLst/>
-          </a:prstGeom>
-          <a:noFill/>
-        </p:spPr>
-        <p:txBody>
-          <a:bodyPr wrap="square">
-            <a:spAutoFit/>
-          </a:bodyPr>
-          <a:lstStyle/>
-          <a:p>
-            <a:pPr>
-              <a:spcAft>
-                <a:spcPts val="1000"/>
-              </a:spcAft>
-              <a:defRPr sz="1600" b="1">
-                <a:solidFill>
-                  <a:srgbClr val="0369A1"/>
-                </a:solidFill>
-              </a:defRPr>
-            </a:pPr>
-            <a:r>
-              <a:t>Hasil Uji Nyata Terhadap 5 Sample CV</a:t>
-            </a:r>
-          </a:p>
-          <a:p>
-            <a:pPr>
-              <a:defRPr sz="1150" b="1">
-                <a:solidFill>
-                  <a:srgbClr val="EF4444"/>
-                </a:solidFill>
-              </a:defRPr>
-            </a:pPr>
-            <a:r>
-              <a:t>• Rank #1: Bayu (Skor: 82.7)</a:t>
-            </a:r>
-          </a:p>
-          <a:p>
-            <a:pPr>
-              <a:spcAft>
-                <a:spcPts val="400"/>
-              </a:spcAft>
-              <a:defRPr sz="1050">
-                <a:solidFill>
-                  <a:srgbClr val="64748B"/>
-                </a:solidFill>
-              </a:defRPr>
-            </a:pPr>
-            <a:r>
-              <a:t>   Lolos (Exp: 5 thn, S1, AutoCAD &amp; SketchUp) ➔ Rekomendasi Wawancara</a:t>
-            </a:r>
-          </a:p>
-          <a:p>
-            <a:pPr>
-              <a:defRPr sz="1150" b="1">
-                <a:solidFill>
-                  <a:srgbClr val="EF4444"/>
-                </a:solidFill>
-              </a:defRPr>
-            </a:pPr>
-            <a:r>
-              <a:t>• Rank #2: INDRI (Skor: 82.6)</a:t>
-            </a:r>
-          </a:p>
-          <a:p>
-            <a:pPr>
-              <a:spcAft>
-                <a:spcPts val="400"/>
-              </a:spcAft>
-              <a:defRPr sz="1050">
-                <a:solidFill>
-                  <a:srgbClr val="64748B"/>
-                </a:solidFill>
-              </a:defRPr>
-            </a:pPr>
-            <a:r>
-              <a:t>   Lolos (Exp: 4 thn, S1, AutoCAD &amp; SketchUp) ➔ Rekomendasi Wawancara</a:t>
-            </a:r>
-          </a:p>
-          <a:p>
-            <a:pPr>
-              <a:defRPr sz="1150" b="1">
-                <a:solidFill>
-                  <a:srgbClr val="EF4444"/>
-                </a:solidFill>
-              </a:defRPr>
-            </a:pPr>
-            <a:r>
-              <a:t>• Rank #3: Dani (Skor: 82.6)</a:t>
-            </a:r>
-          </a:p>
-          <a:p>
-            <a:pPr>
-              <a:spcAft>
-                <a:spcPts val="400"/>
-              </a:spcAft>
-              <a:defRPr sz="1050">
-                <a:solidFill>
-                  <a:srgbClr val="64748B"/>
-                </a:solidFill>
-              </a:defRPr>
-            </a:pPr>
-            <a:r>
-              <a:t>   Lolos (Exp: 10 thn, SMK, AutoCAD &amp; SketchUp) ➔ Rekomendasi Wawancara</a:t>
-            </a:r>
-          </a:p>
-          <a:p>
-            <a:pPr>
-              <a:defRPr sz="1150" b="1">
-                <a:solidFill>
-                  <a:srgbClr val="EF4444"/>
-                </a:solidFill>
-              </a:defRPr>
-            </a:pPr>
-            <a:r>
-              <a:t>• Rank #4: Permana Abadi (Skor: 82.0)</a:t>
-            </a:r>
-          </a:p>
-          <a:p>
-            <a:pPr>
-              <a:spcAft>
-                <a:spcPts val="400"/>
-              </a:spcAft>
-              <a:defRPr sz="1050">
-                <a:solidFill>
-                  <a:srgbClr val="64748B"/>
-                </a:solidFill>
-              </a:defRPr>
-            </a:pPr>
-            <a:r>
-              <a:t>   Lolos (Exp: 2 thn, S1, AutoCAD &amp; SketchUp) ➔ Rekomendasi Wawancara</a:t>
-            </a:r>
-          </a:p>
-          <a:p>
-            <a:pPr>
-              <a:defRPr sz="1150" b="1">
-                <a:solidFill>
-                  <a:srgbClr val="0F172A"/>
-                </a:solidFill>
-              </a:defRPr>
-            </a:pPr>
-            <a:r>
-              <a:t>• Rank #5: MOHAMAD (Skor: 0.0)</a:t>
-            </a:r>
-          </a:p>
-          <a:p>
-            <a:pPr>
-              <a:spcAft>
-                <a:spcPts val="400"/>
-              </a:spcAft>
-              <a:defRPr sz="1050">
-                <a:solidFill>
-                  <a:srgbClr val="64748B"/>
-                </a:solidFill>
-              </a:defRPr>
-            </a:pPr>
-            <a:r>
-              <a:t>   Gagal Syarat Wajib (Skill SketchUp tidak ada) ➔ Tidak Lolos Filter Awal</a:t>
+              <a:t>• Dampak pada Operasional Pabrik: Kekurangan operator &amp; drafter memperlambat shift  ➔  Pemenuhan man-power tepat waktu, zero production downtime</a:t>
             </a:r>
           </a:p>
         </p:txBody>
@@ -4019,7 +4212,7 @@
               </a:defRPr>
             </a:pPr>
             <a:r>
-              <a:t>Roadmap Implementasi Produksi (3 Tahap Eksekusi)</a:t>
+              <a:t>Demonstrasi Proof of Concept (PoC) &amp; Validasi Hasil Uji</a:t>
             </a:r>
           </a:p>
         </p:txBody>
@@ -4076,7 +4269,7 @@
         <p:spPr>
           <a:xfrm>
             <a:off x="731520" y="1645920"/>
-            <a:ext cx="3383280" cy="4572000"/>
+            <a:ext cx="5212080" cy="4572000"/>
           </a:xfrm>
           <a:prstGeom prst="roundRect">
             <a:avLst/>
@@ -4114,57 +4307,14 @@
       </p:sp>
       <p:sp>
         <p:nvSpPr>
-          <p:cNvPr id="7" name="Rectangle 6"/>
-          <p:cNvSpPr/>
-          <p:nvPr/>
-        </p:nvSpPr>
-        <p:spPr>
-          <a:xfrm>
-            <a:off x="731520" y="1645920"/>
-            <a:ext cx="3383280" cy="91440"/>
-          </a:xfrm>
-          <a:prstGeom prst="rect">
-            <a:avLst/>
-          </a:prstGeom>
-          <a:solidFill>
-            <a:srgbClr val="0369A1"/>
-          </a:solidFill>
-          <a:ln>
-            <a:noFill/>
-          </a:ln>
-        </p:spPr>
-        <p:style>
-          <a:lnRef idx="1">
-            <a:schemeClr val="accent1"/>
-          </a:lnRef>
-          <a:fillRef idx="3">
-            <a:schemeClr val="accent1"/>
-          </a:fillRef>
-          <a:effectRef idx="2">
-            <a:schemeClr val="accent1"/>
-          </a:effectRef>
-          <a:fontRef idx="minor">
-            <a:schemeClr val="lt1"/>
-          </a:fontRef>
-        </p:style>
-        <p:txBody>
-          <a:bodyPr rtlCol="0" anchor="ctr"/>
-          <a:lstStyle/>
-          <a:p>
-            <a:pPr algn="ctr"/>
-          </a:p>
-        </p:txBody>
-      </p:sp>
-      <p:sp>
-        <p:nvSpPr>
-          <p:cNvPr id="8" name="TextBox 7"/>
+          <p:cNvPr id="7" name="TextBox 6"/>
           <p:cNvSpPr txBox="1"/>
           <p:nvPr/>
         </p:nvSpPr>
         <p:spPr>
           <a:xfrm>
-            <a:off x="960120" y="1920240"/>
-            <a:ext cx="2926080" cy="4114800"/>
+            <a:off x="1005840" y="1828800"/>
+            <a:ext cx="4663440" cy="4114800"/>
           </a:xfrm>
           <a:prstGeom prst="rect">
             <a:avLst/>
@@ -4178,35 +4328,23 @@
           <a:lstStyle/>
           <a:p>
             <a:pPr>
-              <a:defRPr sz="1400" b="1">
+              <a:spcAft>
+                <a:spcPts val="1000"/>
+              </a:spcAft>
+              <a:defRPr sz="1600" b="1">
                 <a:solidFill>
                   <a:srgbClr val="0F172A"/>
                 </a:solidFill>
               </a:defRPr>
             </a:pPr>
             <a:r>
-              <a:t>Fase 1: Pilot &amp; Validasi</a:t>
-            </a:r>
-          </a:p>
-          <a:p>
-            <a:pPr>
-              <a:spcAft>
-                <a:spcPts val="1200"/>
-              </a:spcAft>
-              <a:defRPr sz="1100" b="1">
-                <a:solidFill>
-                  <a:srgbClr val="0369A1"/>
-                </a:solidFill>
-              </a:defRPr>
-            </a:pPr>
-            <a:r>
-              <a:t>Bulan 1 (Setup &amp; Benchmark)</a:t>
-            </a:r>
-          </a:p>
-          <a:p>
-            <a:pPr>
-              <a:spcBef>
-                <a:spcPts val="800"/>
+              <a:t>Fitur Utama PoC (Streamlit + Gemini)</a:t>
+            </a:r>
+          </a:p>
+          <a:p>
+            <a:pPr>
+              <a:spcBef>
+                <a:spcPts val="600"/>
               </a:spcBef>
               <a:defRPr sz="1100">
                 <a:solidFill>
@@ -4215,13 +4353,13 @@
               </a:defRPr>
             </a:pPr>
             <a:r>
-              <a:t>•  Deployment PoC ke lingkungan internal staging.</a:t>
-            </a:r>
-          </a:p>
-          <a:p>
-            <a:pPr>
-              <a:spcBef>
-                <a:spcPts val="800"/>
+              <a:t>✔  1. Dynamic Job Presets: Template siap pakai untuk Plant CAD Drafter &amp; Backend Engineer Pabrik.</a:t>
+            </a:r>
+          </a:p>
+          <a:p>
+            <a:pPr>
+              <a:spcBef>
+                <a:spcPts val="600"/>
               </a:spcBef>
               <a:defRPr sz="1100">
                 <a:solidFill>
@@ -4230,13 +4368,13 @@
               </a:defRPr>
             </a:pPr>
             <a:r>
-              <a:t>•  Benchmarking skor AI terhadap 200 keputusan manual historis tim HR.</a:t>
-            </a:r>
-          </a:p>
-          <a:p>
-            <a:pPr>
-              <a:spcBef>
-                <a:spcPts val="800"/>
+              <a:t>✔  2. One-Click Demo: Tombol pengujian langsung terhadap 5 CV sampel anonim bawaan.</a:t>
+            </a:r>
+          </a:p>
+          <a:p>
+            <a:pPr>
+              <a:spcBef>
+                <a:spcPts val="600"/>
               </a:spcBef>
               <a:defRPr sz="1100">
                 <a:solidFill>
@@ -4245,13 +4383,13 @@
               </a:defRPr>
             </a:pPr>
             <a:r>
-              <a:t>•  Fine-tuning bobot hybrid (embedding vs LLM) berdasarkan karakteristik peran manufaktur.</a:t>
-            </a:r>
-          </a:p>
-          <a:p>
-            <a:pPr>
-              <a:spcBef>
-                <a:spcPts val="800"/>
+              <a:t>✔  3. Multi-Format Ingestion: Ekstraksi teks otomatis dari file PDF &amp; tabel DOCX.</a:t>
+            </a:r>
+          </a:p>
+          <a:p>
+            <a:pPr>
+              <a:spcBef>
+                <a:spcPts val="600"/>
               </a:spcBef>
               <a:defRPr sz="1100">
                 <a:solidFill>
@@ -4260,21 +4398,51 @@
               </a:defRPr>
             </a:pPr>
             <a:r>
-              <a:t>•  Pelatihan pengoperasian bagi tim rekruter pabrik.</a:t>
-            </a:r>
-          </a:p>
-        </p:txBody>
-      </p:sp>
-      <p:sp>
-        <p:nvSpPr>
-          <p:cNvPr id="9" name="Rounded Rectangle 8"/>
+              <a:t>✔  4. Strict Blind Isolation: PII disensor ketat sebelum proses scoring semantik.</a:t>
+            </a:r>
+          </a:p>
+          <a:p>
+            <a:pPr>
+              <a:spcBef>
+                <a:spcPts val="600"/>
+              </a:spcBef>
+              <a:defRPr sz="1100">
+                <a:solidFill>
+                  <a:srgbClr val="64748B"/>
+                </a:solidFill>
+              </a:defRPr>
+            </a:pPr>
+            <a:r>
+              <a:t>✔  5. Metrik Dashboard: Total pelamar, rasio lolos hard filter, dan rata-rata skor.</a:t>
+            </a:r>
+          </a:p>
+          <a:p>
+            <a:pPr>
+              <a:spcBef>
+                <a:spcPts val="600"/>
+              </a:spcBef>
+              <a:defRPr sz="1100">
+                <a:solidFill>
+                  <a:srgbClr val="64748B"/>
+                </a:solidFill>
+              </a:defRPr>
+            </a:pPr>
+            <a:r>
+              <a:t>✔  6. Audit Trail &amp; CSV Export: Detail kekuatan/kelemahan per kandidat siap diunduh tim HR.</a:t>
+            </a:r>
+          </a:p>
+        </p:txBody>
+      </p:sp>
+      <p:sp>
+        <p:nvSpPr>
+          <p:cNvPr id="8" name="Rounded Rectangle 7"/>
           <p:cNvSpPr/>
           <p:nvPr/>
         </p:nvSpPr>
         <p:spPr>
           <a:xfrm>
-            <a:off x="4389120" y="1645920"/>
-            <a:ext cx="3383280" cy="4572000"/>
+            <a:off x="6217920" y="1645920"/>
+            <a:ext cx="5212080" cy="4572000"/>
           </a:xfrm>
           <a:prstGeom prst="roundRect">
             <a:avLst/>
@@ -4312,57 +4480,14 @@
       </p:sp>
       <p:sp>
         <p:nvSpPr>
-          <p:cNvPr id="10" name="Rectangle 9"/>
-          <p:cNvSpPr/>
-          <p:nvPr/>
-        </p:nvSpPr>
-        <p:spPr>
-          <a:xfrm>
-            <a:off x="4389120" y="1645920"/>
-            <a:ext cx="3383280" cy="91440"/>
-          </a:xfrm>
-          <a:prstGeom prst="rect">
-            <a:avLst/>
-          </a:prstGeom>
-          <a:solidFill>
-            <a:srgbClr val="0EA5E9"/>
-          </a:solidFill>
-          <a:ln>
-            <a:noFill/>
-          </a:ln>
-        </p:spPr>
-        <p:style>
-          <a:lnRef idx="1">
-            <a:schemeClr val="accent1"/>
-          </a:lnRef>
-          <a:fillRef idx="3">
-            <a:schemeClr val="accent1"/>
-          </a:fillRef>
-          <a:effectRef idx="2">
-            <a:schemeClr val="accent1"/>
-          </a:effectRef>
-          <a:fontRef idx="minor">
-            <a:schemeClr val="lt1"/>
-          </a:fontRef>
-        </p:style>
-        <p:txBody>
-          <a:bodyPr rtlCol="0" anchor="ctr"/>
-          <a:lstStyle/>
-          <a:p>
-            <a:pPr algn="ctr"/>
-          </a:p>
-        </p:txBody>
-      </p:sp>
-      <p:sp>
-        <p:nvSpPr>
-          <p:cNvPr id="11" name="TextBox 10"/>
+          <p:cNvPr id="9" name="TextBox 8"/>
           <p:cNvSpPr txBox="1"/>
           <p:nvPr/>
         </p:nvSpPr>
         <p:spPr>
           <a:xfrm>
-            <a:off x="4617720" y="1920240"/>
-            <a:ext cx="2926080" cy="4114800"/>
+            <a:off x="6492240" y="1828800"/>
+            <a:ext cx="4663440" cy="4114800"/>
           </a:xfrm>
           <a:prstGeom prst="rect">
             <a:avLst/>
@@ -4376,287 +4501,152 @@
           <a:lstStyle/>
           <a:p>
             <a:pPr>
-              <a:defRPr sz="1400" b="1">
+              <a:spcAft>
+                <a:spcPts val="1000"/>
+              </a:spcAft>
+              <a:defRPr sz="1600" b="1">
+                <a:solidFill>
+                  <a:srgbClr val="0369A1"/>
+                </a:solidFill>
+              </a:defRPr>
+            </a:pPr>
+            <a:r>
+              <a:t>Hasil Uji Nyata Terhadap 5 Sample CV</a:t>
+            </a:r>
+          </a:p>
+          <a:p>
+            <a:pPr>
+              <a:defRPr sz="1150" b="1">
+                <a:solidFill>
+                  <a:srgbClr val="EF4444"/>
+                </a:solidFill>
+              </a:defRPr>
+            </a:pPr>
+            <a:r>
+              <a:t>• Rank #1: Dani (Skor: 87.4)</a:t>
+            </a:r>
+          </a:p>
+          <a:p>
+            <a:pPr>
+              <a:spcAft>
+                <a:spcPts val="400"/>
+              </a:spcAft>
+              <a:defRPr sz="1050">
+                <a:solidFill>
+                  <a:srgbClr val="64748B"/>
+                </a:solidFill>
+              </a:defRPr>
+            </a:pPr>
+            <a:r>
+              <a:t>   Lolos (Exp: 3 thn, SMK &amp; S1, AutoCAD &amp; SketchUp) ➔ Rekomendasi Utama Wawancara</a:t>
+            </a:r>
+          </a:p>
+          <a:p>
+            <a:pPr>
+              <a:defRPr sz="1150" b="1">
+                <a:solidFill>
+                  <a:srgbClr val="EF4444"/>
+                </a:solidFill>
+              </a:defRPr>
+            </a:pPr>
+            <a:r>
+              <a:t>• Rank #2: INDRI (Skor: 86.3)</a:t>
+            </a:r>
+          </a:p>
+          <a:p>
+            <a:pPr>
+              <a:spcAft>
+                <a:spcPts val="400"/>
+              </a:spcAft>
+              <a:defRPr sz="1050">
+                <a:solidFill>
+                  <a:srgbClr val="64748B"/>
+                </a:solidFill>
+              </a:defRPr>
+            </a:pPr>
+            <a:r>
+              <a:t>   Lolos (Exp: 2 thn, S1 &amp; Master, AutoCAD &amp; SketchUp) ➔ Rekomendasi Wawancara</a:t>
+            </a:r>
+          </a:p>
+          <a:p>
+            <a:pPr>
+              <a:defRPr sz="1150" b="1">
+                <a:solidFill>
+                  <a:srgbClr val="EF4444"/>
+                </a:solidFill>
+              </a:defRPr>
+            </a:pPr>
+            <a:r>
+              <a:t>• Rank #3: Bayu (Skor: 84.3)</a:t>
+            </a:r>
+          </a:p>
+          <a:p>
+            <a:pPr>
+              <a:spcAft>
+                <a:spcPts val="400"/>
+              </a:spcAft>
+              <a:defRPr sz="1050">
+                <a:solidFill>
+                  <a:srgbClr val="64748B"/>
+                </a:solidFill>
+              </a:defRPr>
+            </a:pPr>
+            <a:r>
+              <a:t>   Lolos (Exp: 6 thn, S1 Arsitektur, AutoCAD &amp; SketchUp) ➔ Rekomendasi Wawancara</a:t>
+            </a:r>
+          </a:p>
+          <a:p>
+            <a:pPr>
+              <a:defRPr sz="1150" b="1">
+                <a:solidFill>
+                  <a:srgbClr val="EF4444"/>
+                </a:solidFill>
+              </a:defRPr>
+            </a:pPr>
+            <a:r>
+              <a:t>• Rank #4: Permana Abadi (Skor: 76.6)</a:t>
+            </a:r>
+          </a:p>
+          <a:p>
+            <a:pPr>
+              <a:spcAft>
+                <a:spcPts val="400"/>
+              </a:spcAft>
+              <a:defRPr sz="1050">
+                <a:solidFill>
+                  <a:srgbClr val="64748B"/>
+                </a:solidFill>
+              </a:defRPr>
+            </a:pPr>
+            <a:r>
+              <a:t>   Lolos (Exp: 3 thn, S1, AutoCAD &amp; SketchUp) ➔ Rekomendasi Wawancara</a:t>
+            </a:r>
+          </a:p>
+          <a:p>
+            <a:pPr>
+              <a:defRPr sz="1150" b="1">
                 <a:solidFill>
                   <a:srgbClr val="0F172A"/>
                 </a:solidFill>
               </a:defRPr>
             </a:pPr>
             <a:r>
-              <a:t>Fase 2: Integrasi Sistem</a:t>
+              <a:t>• Rank #5: MOHAMAD (Skor: 0.0)</a:t>
             </a:r>
           </a:p>
           <a:p>
             <a:pPr>
               <a:spcAft>
-                <a:spcPts val="1200"/>
+                <a:spcPts val="400"/>
               </a:spcAft>
-              <a:defRPr sz="1100" b="1">
-                <a:solidFill>
-                  <a:srgbClr val="0EA5E9"/>
-                </a:solidFill>
-              </a:defRPr>
-            </a:pPr>
-            <a:r>
-              <a:t>Bulan 2 - 3 (Automation)</a:t>
-            </a:r>
-          </a:p>
-          <a:p>
-            <a:pPr>
-              <a:spcBef>
-                <a:spcPts val="800"/>
-              </a:spcBef>
-              <a:defRPr sz="1100">
+              <a:defRPr sz="1050">
                 <a:solidFill>
                   <a:srgbClr val="64748B"/>
                 </a:solidFill>
               </a:defRPr>
             </a:pPr>
             <a:r>
-              <a:t>•  Integrasi Webhook resmi dengan Jobstreet &amp; LinkedIn.</a:t>
-            </a:r>
-          </a:p>
-          <a:p>
-            <a:pPr>
-              <a:spcBef>
-                <a:spcPts val="800"/>
-              </a:spcBef>
-              <a:defRPr sz="1100">
-                <a:solidFill>
-                  <a:srgbClr val="64748B"/>
-                </a:solidFill>
-              </a:defRPr>
-            </a:pPr>
-            <a:r>
-              <a:t>•  Koneksi API dua arah ke HRIS / ATS eksisting perusahaan.</a:t>
-            </a:r>
-          </a:p>
-          <a:p>
-            <a:pPr>
-              <a:spcBef>
-                <a:spcPts val="800"/>
-              </a:spcBef>
-              <a:defRPr sz="1100">
-                <a:solidFill>
-                  <a:srgbClr val="64748B"/>
-                </a:solidFill>
-              </a:defRPr>
-            </a:pPr>
-            <a:r>
-              <a:t>•  Implementasi Asynchronous Queue (Celery/RabbitMQ) untuk throughput tinggi.</a:t>
-            </a:r>
-          </a:p>
-          <a:p>
-            <a:pPr>
-              <a:spcBef>
-                <a:spcPts val="800"/>
-              </a:spcBef>
-              <a:defRPr sz="1100">
-                <a:solidFill>
-                  <a:srgbClr val="64748B"/>
-                </a:solidFill>
-              </a:defRPr>
-            </a:pPr>
-            <a:r>
-              <a:t>•  Penerapan audit keamanan data &amp; audit kepatuhan UU PDP.</a:t>
-            </a:r>
-          </a:p>
-        </p:txBody>
-      </p:sp>
-      <p:sp>
-        <p:nvSpPr>
-          <p:cNvPr id="12" name="Rounded Rectangle 11"/>
-          <p:cNvSpPr/>
-          <p:nvPr/>
-        </p:nvSpPr>
-        <p:spPr>
-          <a:xfrm>
-            <a:off x="8046720" y="1645920"/>
-            <a:ext cx="3383280" cy="4572000"/>
-          </a:xfrm>
-          <a:prstGeom prst="roundRect">
-            <a:avLst/>
-          </a:prstGeom>
-          <a:solidFill>
-            <a:srgbClr val="F8FAFC"/>
-          </a:solidFill>
-          <a:ln w="12700">
-            <a:solidFill>
-              <a:srgbClr val="E2E8F0"/>
-            </a:solidFill>
-          </a:ln>
-        </p:spPr>
-        <p:style>
-          <a:lnRef idx="1">
-            <a:schemeClr val="accent1"/>
-          </a:lnRef>
-          <a:fillRef idx="3">
-            <a:schemeClr val="accent1"/>
-          </a:fillRef>
-          <a:effectRef idx="2">
-            <a:schemeClr val="accent1"/>
-          </a:effectRef>
-          <a:fontRef idx="minor">
-            <a:schemeClr val="lt1"/>
-          </a:fontRef>
-        </p:style>
-        <p:txBody>
-          <a:bodyPr rtlCol="0" anchor="ctr"/>
-          <a:lstStyle/>
-          <a:p>
-            <a:pPr algn="ctr"/>
-          </a:p>
-        </p:txBody>
-      </p:sp>
-      <p:sp>
-        <p:nvSpPr>
-          <p:cNvPr id="13" name="Rectangle 12"/>
-          <p:cNvSpPr/>
-          <p:nvPr/>
-        </p:nvSpPr>
-        <p:spPr>
-          <a:xfrm>
-            <a:off x="8046720" y="1645920"/>
-            <a:ext cx="3383280" cy="91440"/>
-          </a:xfrm>
-          <a:prstGeom prst="rect">
-            <a:avLst/>
-          </a:prstGeom>
-          <a:solidFill>
-            <a:srgbClr val="10B981"/>
-          </a:solidFill>
-          <a:ln>
-            <a:noFill/>
-          </a:ln>
-        </p:spPr>
-        <p:style>
-          <a:lnRef idx="1">
-            <a:schemeClr val="accent1"/>
-          </a:lnRef>
-          <a:fillRef idx="3">
-            <a:schemeClr val="accent1"/>
-          </a:fillRef>
-          <a:effectRef idx="2">
-            <a:schemeClr val="accent1"/>
-          </a:effectRef>
-          <a:fontRef idx="minor">
-            <a:schemeClr val="lt1"/>
-          </a:fontRef>
-        </p:style>
-        <p:txBody>
-          <a:bodyPr rtlCol="0" anchor="ctr"/>
-          <a:lstStyle/>
-          <a:p>
-            <a:pPr algn="ctr"/>
-          </a:p>
-        </p:txBody>
-      </p:sp>
-      <p:sp>
-        <p:nvSpPr>
-          <p:cNvPr id="14" name="TextBox 13"/>
-          <p:cNvSpPr txBox="1"/>
-          <p:nvPr/>
-        </p:nvSpPr>
-        <p:spPr>
-          <a:xfrm>
-            <a:off x="8275320" y="1920240"/>
-            <a:ext cx="2926080" cy="4114800"/>
-          </a:xfrm>
-          <a:prstGeom prst="rect">
-            <a:avLst/>
-          </a:prstGeom>
-          <a:noFill/>
-        </p:spPr>
-        <p:txBody>
-          <a:bodyPr wrap="square">
-            <a:spAutoFit/>
-          </a:bodyPr>
-          <a:lstStyle/>
-          <a:p>
-            <a:pPr>
-              <a:defRPr sz="1400" b="1">
-                <a:solidFill>
-                  <a:srgbClr val="0F172A"/>
-                </a:solidFill>
-              </a:defRPr>
-            </a:pPr>
-            <a:r>
-              <a:t>Fase 3: Skalabilitas Penuh</a:t>
-            </a:r>
-          </a:p>
-          <a:p>
-            <a:pPr>
-              <a:spcAft>
-                <a:spcPts val="1200"/>
-              </a:spcAft>
-              <a:defRPr sz="1100" b="1">
-                <a:solidFill>
-                  <a:srgbClr val="10B981"/>
-                </a:solidFill>
-              </a:defRPr>
-            </a:pPr>
-            <a:r>
-              <a:t>Bulan 4+ (Enterprise Scale)</a:t>
-            </a:r>
-          </a:p>
-          <a:p>
-            <a:pPr>
-              <a:spcBef>
-                <a:spcPts val="800"/>
-              </a:spcBef>
-              <a:defRPr sz="1100">
-                <a:solidFill>
-                  <a:srgbClr val="64748B"/>
-                </a:solidFill>
-              </a:defRPr>
-            </a:pPr>
-            <a:r>
-              <a:t>•  Rollout penuh ke seluruh departemen pabrik &amp; plant cabang.</a:t>
-            </a:r>
-          </a:p>
-          <a:p>
-            <a:pPr>
-              <a:spcBef>
-                <a:spcPts val="800"/>
-              </a:spcBef>
-              <a:defRPr sz="1100">
-                <a:solidFill>
-                  <a:srgbClr val="64748B"/>
-                </a:solidFill>
-              </a:defRPr>
-            </a:pPr>
-            <a:r>
-              <a:t>•  Penambahan modul Vision OCR untuk CV scan/gambar non-teks.</a:t>
-            </a:r>
-          </a:p>
-          <a:p>
-            <a:pPr>
-              <a:spcBef>
-                <a:spcPts val="800"/>
-              </a:spcBef>
-              <a:defRPr sz="1100">
-                <a:solidFill>
-                  <a:srgbClr val="64748B"/>
-                </a:solidFill>
-              </a:defRPr>
-            </a:pPr>
-            <a:r>
-              <a:t>•  Modul Automated Interview Scheduling terintegrasi kalender HR.</a:t>
-            </a:r>
-          </a:p>
-          <a:p>
-            <a:pPr>
-              <a:spcBef>
-                <a:spcPts val="800"/>
-              </a:spcBef>
-              <a:defRPr sz="1100">
-                <a:solidFill>
-                  <a:srgbClr val="64748B"/>
-                </a:solidFill>
-              </a:defRPr>
-            </a:pPr>
-            <a:r>
-              <a:t>•  Continuous Learning &amp; evaluasi bias berkala (Quarterly Audit).</a:t>
+              <a:t>   Gagal Syarat Wajib (Skill SketchUp tidak ada) ➔ Tidak Lolos Filter Awal</a:t>
             </a:r>
           </a:p>
         </p:txBody>
@@ -4694,6 +4684,774 @@
             <a:avLst/>
           </a:prstGeom>
           <a:solidFill>
+            <a:srgbClr val="FFFFFF"/>
+          </a:solidFill>
+          <a:ln>
+            <a:noFill/>
+          </a:ln>
+        </p:spPr>
+        <p:style>
+          <a:lnRef idx="1">
+            <a:schemeClr val="accent1"/>
+          </a:lnRef>
+          <a:fillRef idx="3">
+            <a:schemeClr val="accent1"/>
+          </a:fillRef>
+          <a:effectRef idx="2">
+            <a:schemeClr val="accent1"/>
+          </a:effectRef>
+          <a:fontRef idx="minor">
+            <a:schemeClr val="lt1"/>
+          </a:fontRef>
+        </p:style>
+        <p:txBody>
+          <a:bodyPr rtlCol="0" anchor="ctr"/>
+          <a:lstStyle/>
+          <a:p>
+            <a:pPr algn="ctr"/>
+          </a:p>
+        </p:txBody>
+      </p:sp>
+      <p:sp>
+        <p:nvSpPr>
+          <p:cNvPr id="3" name="TextBox 2"/>
+          <p:cNvSpPr txBox="1"/>
+          <p:nvPr/>
+        </p:nvSpPr>
+        <p:spPr>
+          <a:xfrm>
+            <a:off x="731520" y="365760"/>
+            <a:ext cx="10698480" cy="320040"/>
+          </a:xfrm>
+          <a:prstGeom prst="rect">
+            <a:avLst/>
+          </a:prstGeom>
+          <a:noFill/>
+        </p:spPr>
+        <p:txBody>
+          <a:bodyPr wrap="square">
+            <a:spAutoFit/>
+          </a:bodyPr>
+          <a:lstStyle/>
+          <a:p>
+            <a:pPr>
+              <a:defRPr sz="1000" b="1">
+                <a:solidFill>
+                  <a:srgbClr val="0EA5E9"/>
+                </a:solidFill>
+              </a:defRPr>
+            </a:pPr>
+            <a:r>
+              <a:t>TECHNICAL ASSESSMENT: AI SPECIALIST</a:t>
+            </a:r>
+          </a:p>
+        </p:txBody>
+      </p:sp>
+      <p:sp>
+        <p:nvSpPr>
+          <p:cNvPr id="4" name="TextBox 3"/>
+          <p:cNvSpPr txBox="1"/>
+          <p:nvPr/>
+        </p:nvSpPr>
+        <p:spPr>
+          <a:xfrm>
+            <a:off x="731520" y="621792"/>
+            <a:ext cx="10698480" cy="731520"/>
+          </a:xfrm>
+          <a:prstGeom prst="rect">
+            <a:avLst/>
+          </a:prstGeom>
+          <a:noFill/>
+        </p:spPr>
+        <p:txBody>
+          <a:bodyPr wrap="square">
+            <a:spAutoFit/>
+          </a:bodyPr>
+          <a:lstStyle/>
+          <a:p>
+            <a:pPr>
+              <a:defRPr sz="2200" b="1">
+                <a:solidFill>
+                  <a:srgbClr val="0F172A"/>
+                </a:solidFill>
+              </a:defRPr>
+            </a:pPr>
+            <a:r>
+              <a:t>Roadmap Implementasi Produksi (3 Tahap Eksekusi)</a:t>
+            </a:r>
+          </a:p>
+        </p:txBody>
+      </p:sp>
+      <p:sp>
+        <p:nvSpPr>
+          <p:cNvPr id="5" name="Rectangle 4"/>
+          <p:cNvSpPr/>
+          <p:nvPr/>
+        </p:nvSpPr>
+        <p:spPr>
+          <a:xfrm>
+            <a:off x="731520" y="1353312"/>
+            <a:ext cx="10698480" cy="18288"/>
+          </a:xfrm>
+          <a:prstGeom prst="rect">
+            <a:avLst/>
+          </a:prstGeom>
+          <a:solidFill>
+            <a:srgbClr val="E2E8F0"/>
+          </a:solidFill>
+          <a:ln>
+            <a:noFill/>
+          </a:ln>
+        </p:spPr>
+        <p:style>
+          <a:lnRef idx="1">
+            <a:schemeClr val="accent1"/>
+          </a:lnRef>
+          <a:fillRef idx="3">
+            <a:schemeClr val="accent1"/>
+          </a:fillRef>
+          <a:effectRef idx="2">
+            <a:schemeClr val="accent1"/>
+          </a:effectRef>
+          <a:fontRef idx="minor">
+            <a:schemeClr val="lt1"/>
+          </a:fontRef>
+        </p:style>
+        <p:txBody>
+          <a:bodyPr rtlCol="0" anchor="ctr"/>
+          <a:lstStyle/>
+          <a:p>
+            <a:pPr algn="ctr"/>
+          </a:p>
+        </p:txBody>
+      </p:sp>
+      <p:sp>
+        <p:nvSpPr>
+          <p:cNvPr id="6" name="Rounded Rectangle 5"/>
+          <p:cNvSpPr/>
+          <p:nvPr/>
+        </p:nvSpPr>
+        <p:spPr>
+          <a:xfrm>
+            <a:off x="731520" y="1645920"/>
+            <a:ext cx="3383280" cy="4572000"/>
+          </a:xfrm>
+          <a:prstGeom prst="roundRect">
+            <a:avLst/>
+          </a:prstGeom>
+          <a:solidFill>
+            <a:srgbClr val="F8FAFC"/>
+          </a:solidFill>
+          <a:ln w="12700">
+            <a:solidFill>
+              <a:srgbClr val="E2E8F0"/>
+            </a:solidFill>
+          </a:ln>
+        </p:spPr>
+        <p:style>
+          <a:lnRef idx="1">
+            <a:schemeClr val="accent1"/>
+          </a:lnRef>
+          <a:fillRef idx="3">
+            <a:schemeClr val="accent1"/>
+          </a:fillRef>
+          <a:effectRef idx="2">
+            <a:schemeClr val="accent1"/>
+          </a:effectRef>
+          <a:fontRef idx="minor">
+            <a:schemeClr val="lt1"/>
+          </a:fontRef>
+        </p:style>
+        <p:txBody>
+          <a:bodyPr rtlCol="0" anchor="ctr"/>
+          <a:lstStyle/>
+          <a:p>
+            <a:pPr algn="ctr"/>
+          </a:p>
+        </p:txBody>
+      </p:sp>
+      <p:sp>
+        <p:nvSpPr>
+          <p:cNvPr id="7" name="Rectangle 6"/>
+          <p:cNvSpPr/>
+          <p:nvPr/>
+        </p:nvSpPr>
+        <p:spPr>
+          <a:xfrm>
+            <a:off x="731520" y="1645920"/>
+            <a:ext cx="3383280" cy="91440"/>
+          </a:xfrm>
+          <a:prstGeom prst="rect">
+            <a:avLst/>
+          </a:prstGeom>
+          <a:solidFill>
+            <a:srgbClr val="0369A1"/>
+          </a:solidFill>
+          <a:ln>
+            <a:noFill/>
+          </a:ln>
+        </p:spPr>
+        <p:style>
+          <a:lnRef idx="1">
+            <a:schemeClr val="accent1"/>
+          </a:lnRef>
+          <a:fillRef idx="3">
+            <a:schemeClr val="accent1"/>
+          </a:fillRef>
+          <a:effectRef idx="2">
+            <a:schemeClr val="accent1"/>
+          </a:effectRef>
+          <a:fontRef idx="minor">
+            <a:schemeClr val="lt1"/>
+          </a:fontRef>
+        </p:style>
+        <p:txBody>
+          <a:bodyPr rtlCol="0" anchor="ctr"/>
+          <a:lstStyle/>
+          <a:p>
+            <a:pPr algn="ctr"/>
+          </a:p>
+        </p:txBody>
+      </p:sp>
+      <p:sp>
+        <p:nvSpPr>
+          <p:cNvPr id="8" name="TextBox 7"/>
+          <p:cNvSpPr txBox="1"/>
+          <p:nvPr/>
+        </p:nvSpPr>
+        <p:spPr>
+          <a:xfrm>
+            <a:off x="960120" y="1920240"/>
+            <a:ext cx="2926080" cy="4114800"/>
+          </a:xfrm>
+          <a:prstGeom prst="rect">
+            <a:avLst/>
+          </a:prstGeom>
+          <a:noFill/>
+        </p:spPr>
+        <p:txBody>
+          <a:bodyPr wrap="square">
+            <a:spAutoFit/>
+          </a:bodyPr>
+          <a:lstStyle/>
+          <a:p>
+            <a:pPr>
+              <a:defRPr sz="1400" b="1">
+                <a:solidFill>
+                  <a:srgbClr val="0F172A"/>
+                </a:solidFill>
+              </a:defRPr>
+            </a:pPr>
+            <a:r>
+              <a:t>Fase 1: Pilot &amp; Validasi</a:t>
+            </a:r>
+          </a:p>
+          <a:p>
+            <a:pPr>
+              <a:spcAft>
+                <a:spcPts val="1200"/>
+              </a:spcAft>
+              <a:defRPr sz="1100" b="1">
+                <a:solidFill>
+                  <a:srgbClr val="0369A1"/>
+                </a:solidFill>
+              </a:defRPr>
+            </a:pPr>
+            <a:r>
+              <a:t>Bulan 1 (Setup &amp; Benchmark)</a:t>
+            </a:r>
+          </a:p>
+          <a:p>
+            <a:pPr>
+              <a:spcBef>
+                <a:spcPts val="800"/>
+              </a:spcBef>
+              <a:defRPr sz="1100">
+                <a:solidFill>
+                  <a:srgbClr val="64748B"/>
+                </a:solidFill>
+              </a:defRPr>
+            </a:pPr>
+            <a:r>
+              <a:t>•  Deployment PoC ke lingkungan internal staging.</a:t>
+            </a:r>
+          </a:p>
+          <a:p>
+            <a:pPr>
+              <a:spcBef>
+                <a:spcPts val="800"/>
+              </a:spcBef>
+              <a:defRPr sz="1100">
+                <a:solidFill>
+                  <a:srgbClr val="64748B"/>
+                </a:solidFill>
+              </a:defRPr>
+            </a:pPr>
+            <a:r>
+              <a:t>•  Benchmarking skor AI terhadap 200 keputusan manual historis tim HR.</a:t>
+            </a:r>
+          </a:p>
+          <a:p>
+            <a:pPr>
+              <a:spcBef>
+                <a:spcPts val="800"/>
+              </a:spcBef>
+              <a:defRPr sz="1100">
+                <a:solidFill>
+                  <a:srgbClr val="64748B"/>
+                </a:solidFill>
+              </a:defRPr>
+            </a:pPr>
+            <a:r>
+              <a:t>•  Fine-tuning bobot hybrid (embedding vs LLM) berdasarkan karakteristik peran manufaktur.</a:t>
+            </a:r>
+          </a:p>
+          <a:p>
+            <a:pPr>
+              <a:spcBef>
+                <a:spcPts val="800"/>
+              </a:spcBef>
+              <a:defRPr sz="1100">
+                <a:solidFill>
+                  <a:srgbClr val="64748B"/>
+                </a:solidFill>
+              </a:defRPr>
+            </a:pPr>
+            <a:r>
+              <a:t>•  Pelatihan pengoperasian bagi tim rekruter pabrik.</a:t>
+            </a:r>
+          </a:p>
+        </p:txBody>
+      </p:sp>
+      <p:sp>
+        <p:nvSpPr>
+          <p:cNvPr id="9" name="Rounded Rectangle 8"/>
+          <p:cNvSpPr/>
+          <p:nvPr/>
+        </p:nvSpPr>
+        <p:spPr>
+          <a:xfrm>
+            <a:off x="4389120" y="1645920"/>
+            <a:ext cx="3383280" cy="4572000"/>
+          </a:xfrm>
+          <a:prstGeom prst="roundRect">
+            <a:avLst/>
+          </a:prstGeom>
+          <a:solidFill>
+            <a:srgbClr val="F8FAFC"/>
+          </a:solidFill>
+          <a:ln w="12700">
+            <a:solidFill>
+              <a:srgbClr val="E2E8F0"/>
+            </a:solidFill>
+          </a:ln>
+        </p:spPr>
+        <p:style>
+          <a:lnRef idx="1">
+            <a:schemeClr val="accent1"/>
+          </a:lnRef>
+          <a:fillRef idx="3">
+            <a:schemeClr val="accent1"/>
+          </a:fillRef>
+          <a:effectRef idx="2">
+            <a:schemeClr val="accent1"/>
+          </a:effectRef>
+          <a:fontRef idx="minor">
+            <a:schemeClr val="lt1"/>
+          </a:fontRef>
+        </p:style>
+        <p:txBody>
+          <a:bodyPr rtlCol="0" anchor="ctr"/>
+          <a:lstStyle/>
+          <a:p>
+            <a:pPr algn="ctr"/>
+          </a:p>
+        </p:txBody>
+      </p:sp>
+      <p:sp>
+        <p:nvSpPr>
+          <p:cNvPr id="10" name="Rectangle 9"/>
+          <p:cNvSpPr/>
+          <p:nvPr/>
+        </p:nvSpPr>
+        <p:spPr>
+          <a:xfrm>
+            <a:off x="4389120" y="1645920"/>
+            <a:ext cx="3383280" cy="91440"/>
+          </a:xfrm>
+          <a:prstGeom prst="rect">
+            <a:avLst/>
+          </a:prstGeom>
+          <a:solidFill>
+            <a:srgbClr val="0EA5E9"/>
+          </a:solidFill>
+          <a:ln>
+            <a:noFill/>
+          </a:ln>
+        </p:spPr>
+        <p:style>
+          <a:lnRef idx="1">
+            <a:schemeClr val="accent1"/>
+          </a:lnRef>
+          <a:fillRef idx="3">
+            <a:schemeClr val="accent1"/>
+          </a:fillRef>
+          <a:effectRef idx="2">
+            <a:schemeClr val="accent1"/>
+          </a:effectRef>
+          <a:fontRef idx="minor">
+            <a:schemeClr val="lt1"/>
+          </a:fontRef>
+        </p:style>
+        <p:txBody>
+          <a:bodyPr rtlCol="0" anchor="ctr"/>
+          <a:lstStyle/>
+          <a:p>
+            <a:pPr algn="ctr"/>
+          </a:p>
+        </p:txBody>
+      </p:sp>
+      <p:sp>
+        <p:nvSpPr>
+          <p:cNvPr id="11" name="TextBox 10"/>
+          <p:cNvSpPr txBox="1"/>
+          <p:nvPr/>
+        </p:nvSpPr>
+        <p:spPr>
+          <a:xfrm>
+            <a:off x="4617720" y="1920240"/>
+            <a:ext cx="2926080" cy="4114800"/>
+          </a:xfrm>
+          <a:prstGeom prst="rect">
+            <a:avLst/>
+          </a:prstGeom>
+          <a:noFill/>
+        </p:spPr>
+        <p:txBody>
+          <a:bodyPr wrap="square">
+            <a:spAutoFit/>
+          </a:bodyPr>
+          <a:lstStyle/>
+          <a:p>
+            <a:pPr>
+              <a:defRPr sz="1400" b="1">
+                <a:solidFill>
+                  <a:srgbClr val="0F172A"/>
+                </a:solidFill>
+              </a:defRPr>
+            </a:pPr>
+            <a:r>
+              <a:t>Fase 2: Integrasi Sistem</a:t>
+            </a:r>
+          </a:p>
+          <a:p>
+            <a:pPr>
+              <a:spcAft>
+                <a:spcPts val="1200"/>
+              </a:spcAft>
+              <a:defRPr sz="1100" b="1">
+                <a:solidFill>
+                  <a:srgbClr val="0EA5E9"/>
+                </a:solidFill>
+              </a:defRPr>
+            </a:pPr>
+            <a:r>
+              <a:t>Bulan 2 - 3 (Automation)</a:t>
+            </a:r>
+          </a:p>
+          <a:p>
+            <a:pPr>
+              <a:spcBef>
+                <a:spcPts val="800"/>
+              </a:spcBef>
+              <a:defRPr sz="1100">
+                <a:solidFill>
+                  <a:srgbClr val="64748B"/>
+                </a:solidFill>
+              </a:defRPr>
+            </a:pPr>
+            <a:r>
+              <a:t>•  Integrasi Webhook resmi dengan Jobstreet &amp; LinkedIn.</a:t>
+            </a:r>
+          </a:p>
+          <a:p>
+            <a:pPr>
+              <a:spcBef>
+                <a:spcPts val="800"/>
+              </a:spcBef>
+              <a:defRPr sz="1100">
+                <a:solidFill>
+                  <a:srgbClr val="64748B"/>
+                </a:solidFill>
+              </a:defRPr>
+            </a:pPr>
+            <a:r>
+              <a:t>•  Koneksi API dua arah ke HRIS / ATS eksisting perusahaan.</a:t>
+            </a:r>
+          </a:p>
+          <a:p>
+            <a:pPr>
+              <a:spcBef>
+                <a:spcPts val="800"/>
+              </a:spcBef>
+              <a:defRPr sz="1100">
+                <a:solidFill>
+                  <a:srgbClr val="64748B"/>
+                </a:solidFill>
+              </a:defRPr>
+            </a:pPr>
+            <a:r>
+              <a:t>•  Implementasi Asynchronous Queue (Celery/RabbitMQ) untuk throughput tinggi.</a:t>
+            </a:r>
+          </a:p>
+          <a:p>
+            <a:pPr>
+              <a:spcBef>
+                <a:spcPts val="800"/>
+              </a:spcBef>
+              <a:defRPr sz="1100">
+                <a:solidFill>
+                  <a:srgbClr val="64748B"/>
+                </a:solidFill>
+              </a:defRPr>
+            </a:pPr>
+            <a:r>
+              <a:t>•  Penerapan audit keamanan data &amp; audit kepatuhan UU PDP.</a:t>
+            </a:r>
+          </a:p>
+        </p:txBody>
+      </p:sp>
+      <p:sp>
+        <p:nvSpPr>
+          <p:cNvPr id="12" name="Rounded Rectangle 11"/>
+          <p:cNvSpPr/>
+          <p:nvPr/>
+        </p:nvSpPr>
+        <p:spPr>
+          <a:xfrm>
+            <a:off x="8046720" y="1645920"/>
+            <a:ext cx="3383280" cy="4572000"/>
+          </a:xfrm>
+          <a:prstGeom prst="roundRect">
+            <a:avLst/>
+          </a:prstGeom>
+          <a:solidFill>
+            <a:srgbClr val="F8FAFC"/>
+          </a:solidFill>
+          <a:ln w="12700">
+            <a:solidFill>
+              <a:srgbClr val="E2E8F0"/>
+            </a:solidFill>
+          </a:ln>
+        </p:spPr>
+        <p:style>
+          <a:lnRef idx="1">
+            <a:schemeClr val="accent1"/>
+          </a:lnRef>
+          <a:fillRef idx="3">
+            <a:schemeClr val="accent1"/>
+          </a:fillRef>
+          <a:effectRef idx="2">
+            <a:schemeClr val="accent1"/>
+          </a:effectRef>
+          <a:fontRef idx="minor">
+            <a:schemeClr val="lt1"/>
+          </a:fontRef>
+        </p:style>
+        <p:txBody>
+          <a:bodyPr rtlCol="0" anchor="ctr"/>
+          <a:lstStyle/>
+          <a:p>
+            <a:pPr algn="ctr"/>
+          </a:p>
+        </p:txBody>
+      </p:sp>
+      <p:sp>
+        <p:nvSpPr>
+          <p:cNvPr id="13" name="Rectangle 12"/>
+          <p:cNvSpPr/>
+          <p:nvPr/>
+        </p:nvSpPr>
+        <p:spPr>
+          <a:xfrm>
+            <a:off x="8046720" y="1645920"/>
+            <a:ext cx="3383280" cy="91440"/>
+          </a:xfrm>
+          <a:prstGeom prst="rect">
+            <a:avLst/>
+          </a:prstGeom>
+          <a:solidFill>
+            <a:srgbClr val="10B981"/>
+          </a:solidFill>
+          <a:ln>
+            <a:noFill/>
+          </a:ln>
+        </p:spPr>
+        <p:style>
+          <a:lnRef idx="1">
+            <a:schemeClr val="accent1"/>
+          </a:lnRef>
+          <a:fillRef idx="3">
+            <a:schemeClr val="accent1"/>
+          </a:fillRef>
+          <a:effectRef idx="2">
+            <a:schemeClr val="accent1"/>
+          </a:effectRef>
+          <a:fontRef idx="minor">
+            <a:schemeClr val="lt1"/>
+          </a:fontRef>
+        </p:style>
+        <p:txBody>
+          <a:bodyPr rtlCol="0" anchor="ctr"/>
+          <a:lstStyle/>
+          <a:p>
+            <a:pPr algn="ctr"/>
+          </a:p>
+        </p:txBody>
+      </p:sp>
+      <p:sp>
+        <p:nvSpPr>
+          <p:cNvPr id="14" name="TextBox 13"/>
+          <p:cNvSpPr txBox="1"/>
+          <p:nvPr/>
+        </p:nvSpPr>
+        <p:spPr>
+          <a:xfrm>
+            <a:off x="8275320" y="1920240"/>
+            <a:ext cx="2926080" cy="4114800"/>
+          </a:xfrm>
+          <a:prstGeom prst="rect">
+            <a:avLst/>
+          </a:prstGeom>
+          <a:noFill/>
+        </p:spPr>
+        <p:txBody>
+          <a:bodyPr wrap="square">
+            <a:spAutoFit/>
+          </a:bodyPr>
+          <a:lstStyle/>
+          <a:p>
+            <a:pPr>
+              <a:defRPr sz="1400" b="1">
+                <a:solidFill>
+                  <a:srgbClr val="0F172A"/>
+                </a:solidFill>
+              </a:defRPr>
+            </a:pPr>
+            <a:r>
+              <a:t>Fase 3: Skalabilitas Penuh</a:t>
+            </a:r>
+          </a:p>
+          <a:p>
+            <a:pPr>
+              <a:spcAft>
+                <a:spcPts val="1200"/>
+              </a:spcAft>
+              <a:defRPr sz="1100" b="1">
+                <a:solidFill>
+                  <a:srgbClr val="10B981"/>
+                </a:solidFill>
+              </a:defRPr>
+            </a:pPr>
+            <a:r>
+              <a:t>Bulan 4+ (Enterprise Scale)</a:t>
+            </a:r>
+          </a:p>
+          <a:p>
+            <a:pPr>
+              <a:spcBef>
+                <a:spcPts val="800"/>
+              </a:spcBef>
+              <a:defRPr sz="1100">
+                <a:solidFill>
+                  <a:srgbClr val="64748B"/>
+                </a:solidFill>
+              </a:defRPr>
+            </a:pPr>
+            <a:r>
+              <a:t>•  Rollout penuh ke seluruh departemen pabrik &amp; plant cabang.</a:t>
+            </a:r>
+          </a:p>
+          <a:p>
+            <a:pPr>
+              <a:spcBef>
+                <a:spcPts val="800"/>
+              </a:spcBef>
+              <a:defRPr sz="1100">
+                <a:solidFill>
+                  <a:srgbClr val="64748B"/>
+                </a:solidFill>
+              </a:defRPr>
+            </a:pPr>
+            <a:r>
+              <a:t>•  Penambahan modul Vision OCR untuk CV scan/gambar non-teks.</a:t>
+            </a:r>
+          </a:p>
+          <a:p>
+            <a:pPr>
+              <a:spcBef>
+                <a:spcPts val="800"/>
+              </a:spcBef>
+              <a:defRPr sz="1100">
+                <a:solidFill>
+                  <a:srgbClr val="64748B"/>
+                </a:solidFill>
+              </a:defRPr>
+            </a:pPr>
+            <a:r>
+              <a:t>•  Modul Automated Interview Scheduling terintegrasi kalender HR.</a:t>
+            </a:r>
+          </a:p>
+          <a:p>
+            <a:pPr>
+              <a:spcBef>
+                <a:spcPts val="800"/>
+              </a:spcBef>
+              <a:defRPr sz="1100">
+                <a:solidFill>
+                  <a:srgbClr val="64748B"/>
+                </a:solidFill>
+              </a:defRPr>
+            </a:pPr>
+            <a:r>
+              <a:t>•  Continuous Learning &amp; evaluasi bias berkala (Quarterly Audit).</a:t>
+            </a:r>
+          </a:p>
+        </p:txBody>
+      </p:sp>
+    </p:spTree>
+  </p:cSld>
+  <p:clrMapOvr>
+    <a:masterClrMapping/>
+  </p:clrMapOvr>
+</p:sld>
+</file>
+
+<file path=ppt/slides/slide13.xml><?xml version="1.0" encoding="utf-8"?>
+<p:sld xmlns:a="http://schemas.openxmlformats.org/drawingml/2006/main" xmlns:p="http://schemas.openxmlformats.org/presentationml/2006/main" xmlns:r="http://schemas.openxmlformats.org/officeDocument/2006/relationships">
+  <p:cSld>
+    <p:spTree>
+      <p:nvGrpSpPr>
+        <p:cNvPr id="1" name=""/>
+        <p:cNvGrpSpPr/>
+        <p:nvPr/>
+      </p:nvGrpSpPr>
+      <p:grpSpPr/>
+      <p:sp>
+        <p:nvSpPr>
+          <p:cNvPr id="2" name="Rectangle 1"/>
+          <p:cNvSpPr/>
+          <p:nvPr/>
+        </p:nvSpPr>
+        <p:spPr>
+          <a:xfrm>
+            <a:off x="0" y="0"/>
+            <a:ext cx="12191695" cy="6858000"/>
+          </a:xfrm>
+          <a:prstGeom prst="rect">
+            <a:avLst/>
+          </a:prstGeom>
+          <a:solidFill>
             <a:srgbClr val="0F172A"/>
           </a:solidFill>
           <a:ln>
@@ -7392,7 +8150,7 @@
               </a:defRPr>
             </a:pPr>
             <a:r>
-              <a:t>Pemilihan Model &amp; Algoritma AI/ML: Mengapa Pendekatan Hybrid?</a:t>
+              <a:t>Orkestrasi Ingestion &amp; Notifikasi Otomatis via n8n Workflow</a:t>
             </a:r>
           </a:p>
         </p:txBody>
@@ -7448,8 +8206,100 @@
         </p:nvSpPr>
         <p:spPr>
           <a:xfrm>
-            <a:off x="731520" y="1645920"/>
-            <a:ext cx="3383280" cy="4572000"/>
+            <a:off x="731520" y="1536192"/>
+            <a:ext cx="10698480" cy="1005840"/>
+          </a:xfrm>
+          <a:prstGeom prst="roundRect">
+            <a:avLst/>
+          </a:prstGeom>
+          <a:solidFill>
+            <a:srgbClr val="E0F2FE"/>
+          </a:solidFill>
+          <a:ln w="12700">
+            <a:solidFill>
+              <a:srgbClr val="0EA5E9"/>
+            </a:solidFill>
+          </a:ln>
+        </p:spPr>
+        <p:style>
+          <a:lnRef idx="1">
+            <a:schemeClr val="accent1"/>
+          </a:lnRef>
+          <a:fillRef idx="3">
+            <a:schemeClr val="accent1"/>
+          </a:fillRef>
+          <a:effectRef idx="2">
+            <a:schemeClr val="accent1"/>
+          </a:effectRef>
+          <a:fontRef idx="minor">
+            <a:schemeClr val="lt1"/>
+          </a:fontRef>
+        </p:style>
+        <p:txBody>
+          <a:bodyPr rtlCol="0" anchor="ctr"/>
+          <a:lstStyle/>
+          <a:p>
+            <a:pPr algn="ctr"/>
+          </a:p>
+        </p:txBody>
+      </p:sp>
+      <p:sp>
+        <p:nvSpPr>
+          <p:cNvPr id="7" name="TextBox 6"/>
+          <p:cNvSpPr txBox="1"/>
+          <p:nvPr/>
+        </p:nvSpPr>
+        <p:spPr>
+          <a:xfrm>
+            <a:off x="914400" y="1572768"/>
+            <a:ext cx="10332720" cy="868680"/>
+          </a:xfrm>
+          <a:prstGeom prst="rect">
+            <a:avLst/>
+          </a:prstGeom>
+          <a:noFill/>
+        </p:spPr>
+        <p:txBody>
+          <a:bodyPr wrap="square">
+            <a:spAutoFit/>
+          </a:bodyPr>
+          <a:lstStyle/>
+          <a:p>
+            <a:pPr>
+              <a:defRPr sz="1300" b="1">
+                <a:solidFill>
+                  <a:srgbClr val="0369A1"/>
+                </a:solidFill>
+              </a:defRPr>
+            </a:pPr>
+            <a:r>
+              <a:t>Mengapa Memilih n8n sebagai Event-Driven Orchestration Layer?</a:t>
+            </a:r>
+          </a:p>
+          <a:p>
+            <a:pPr>
+              <a:defRPr sz="1100">
+                <a:solidFill>
+                  <a:srgbClr val="0F172A"/>
+                </a:solidFill>
+              </a:defRPr>
+            </a:pPr>
+            <a:r>
+              <a:t>n8n berperan sebagai 'glue code' enterprise yang menghubungkan portal kerja luar dengan AI Screening Engine internal kita secara aman, instan (&lt; 5 detik), dan dapat di-host on-premise di server pabrik demi kepatuhan total UU PDP No. 27/2022.</a:t>
+            </a:r>
+          </a:p>
+        </p:txBody>
+      </p:sp>
+      <p:sp>
+        <p:nvSpPr>
+          <p:cNvPr id="8" name="Rounded Rectangle 7"/>
+          <p:cNvSpPr/>
+          <p:nvPr/>
+        </p:nvSpPr>
+        <p:spPr>
+          <a:xfrm>
+            <a:off x="731520" y="2651760"/>
+            <a:ext cx="5212080" cy="3840480"/>
           </a:xfrm>
           <a:prstGeom prst="roundRect">
             <a:avLst/>
@@ -7487,57 +8337,14 @@
       </p:sp>
       <p:sp>
         <p:nvSpPr>
-          <p:cNvPr id="7" name="Rectangle 6"/>
-          <p:cNvSpPr/>
-          <p:nvPr/>
-        </p:nvSpPr>
-        <p:spPr>
-          <a:xfrm>
-            <a:off x="731520" y="1645920"/>
-            <a:ext cx="3383280" cy="91440"/>
-          </a:xfrm>
-          <a:prstGeom prst="rect">
-            <a:avLst/>
-          </a:prstGeom>
-          <a:solidFill>
-            <a:srgbClr val="EF4444"/>
-          </a:solidFill>
-          <a:ln>
-            <a:noFill/>
-          </a:ln>
-        </p:spPr>
-        <p:style>
-          <a:lnRef idx="1">
-            <a:schemeClr val="accent1"/>
-          </a:lnRef>
-          <a:fillRef idx="3">
-            <a:schemeClr val="accent1"/>
-          </a:fillRef>
-          <a:effectRef idx="2">
-            <a:schemeClr val="accent1"/>
-          </a:effectRef>
-          <a:fontRef idx="minor">
-            <a:schemeClr val="lt1"/>
-          </a:fontRef>
-        </p:style>
-        <p:txBody>
-          <a:bodyPr rtlCol="0" anchor="ctr"/>
-          <a:lstStyle/>
-          <a:p>
-            <a:pPr algn="ctr"/>
-          </a:p>
-        </p:txBody>
-      </p:sp>
-      <p:sp>
-        <p:nvSpPr>
-          <p:cNvPr id="8" name="TextBox 7"/>
+          <p:cNvPr id="9" name="TextBox 8"/>
           <p:cNvSpPr txBox="1"/>
           <p:nvPr/>
         </p:nvSpPr>
         <p:spPr>
           <a:xfrm>
-            <a:off x="960120" y="1920240"/>
-            <a:ext cx="2926080" cy="4114800"/>
+            <a:off x="914400" y="2788920"/>
+            <a:ext cx="4846320" cy="3566160"/>
           </a:xfrm>
           <a:prstGeom prst="rect">
             <a:avLst/>
@@ -7551,29 +8358,17 @@
           <a:lstStyle/>
           <a:p>
             <a:pPr>
-              <a:defRPr sz="1400" b="1">
-                <a:solidFill>
-                  <a:srgbClr val="0F172A"/>
-                </a:solidFill>
-              </a:defRPr>
-            </a:pPr>
-            <a:r>
-              <a:t>Model LLM Murni (Generative Only)</a:t>
-            </a:r>
-          </a:p>
-          <a:p>
-            <a:pPr>
               <a:spcAft>
-                <a:spcPts val="1000"/>
+                <a:spcPts val="800"/>
               </a:spcAft>
-              <a:defRPr sz="1100" b="1">
-                <a:solidFill>
-                  <a:srgbClr val="EF4444"/>
-                </a:solidFill>
-              </a:defRPr>
-            </a:pPr>
-            <a:r>
-              <a:t>Pintar, Namun Mahal &amp; Fluktuatif</a:t>
+              <a:defRPr sz="1500" b="1">
+                <a:solidFill>
+                  <a:srgbClr val="0369A1"/>
+                </a:solidFill>
+              </a:defRPr>
+            </a:pPr>
+            <a:r>
+              <a:t>Arsitektur Pipeline 5-Node di n8n</a:t>
             </a:r>
           </a:p>
           <a:p>
@@ -7588,7 +8383,7 @@
               </a:defRPr>
             </a:pPr>
             <a:r>
-              <a:t>•  Kelebihan: Penalaran kualitatif sangat baik.</a:t>
+              <a:t>⚙ 1. Trigger Node: Webhook Job Portal (Jobstreet/LinkedIn) + IMAP Email Watcher.</a:t>
             </a:r>
           </a:p>
           <a:p>
@@ -7603,7 +8398,7 @@
               </a:defRPr>
             </a:pPr>
             <a:r>
-              <a:t>•  Kelemahan: Biaya API token membengkak untuk volume ribuan CV.</a:t>
+              <a:t>⚙ 2. Storage Node: Upload file CV mentah ke MinIO/S3 lokal pabrik (AES-256).</a:t>
             </a:r>
           </a:p>
           <a:p>
@@ -7618,7 +8413,7 @@
               </a:defRPr>
             </a:pPr>
             <a:r>
-              <a:t>•  Non-deterministik: Ada fluktuasi skor antar-run untuk kandidat yang sama jika temperatur &gt; 0.</a:t>
+              <a:t>⚙ 3. AI Execution: HTTP Request POST memanggil Python Microservice (/api/v1/screen-cv).</a:t>
             </a:r>
           </a:p>
           <a:p>
@@ -7633,21 +8428,40 @@
               </a:defRPr>
             </a:pPr>
             <a:r>
-              <a:t>•  Latency tinggi: Tidak efisien untuk filtering awal ribuan pelamar.</a:t>
-            </a:r>
-          </a:p>
-        </p:txBody>
-      </p:sp>
-      <p:sp>
-        <p:nvSpPr>
-          <p:cNvPr id="9" name="Rounded Rectangle 8"/>
+              <a:t>⚙ 4. Decision Node: Switch Rule: Cek Skor &gt;= 75 dan Lolos Syarat Wajib.</a:t>
+            </a:r>
+          </a:p>
+          <a:p>
+            <a:pPr>
+              <a:spcBef>
+                <a:spcPts val="600"/>
+              </a:spcBef>
+              <a:defRPr sz="1050">
+                <a:solidFill>
+                  <a:srgbClr val="64748B"/>
+                </a:solidFill>
+              </a:defRPr>
+            </a:pPr>
+            <a:r>
+              <a:t>⚙ 5. Dual Branching: Lolos ➔ Auto-Invite Email + Slack HR Alert + Sync ATS.</a:t>
+            </a:r>
+            <a:br/>
+            <a:r>
+              <a:t>    Tidak Lolos ➔ Arsipkan ke Talent Pool DB + Rejection Email Sopan.</a:t>
+            </a:r>
+          </a:p>
+        </p:txBody>
+      </p:sp>
+      <p:sp>
+        <p:nvSpPr>
+          <p:cNvPr id="10" name="Rounded Rectangle 9"/>
           <p:cNvSpPr/>
           <p:nvPr/>
         </p:nvSpPr>
         <p:spPr>
           <a:xfrm>
-            <a:off x="4389120" y="1645920"/>
-            <a:ext cx="3383280" cy="4572000"/>
+            <a:off x="6217920" y="2651760"/>
+            <a:ext cx="5212080" cy="3840480"/>
           </a:xfrm>
           <a:prstGeom prst="roundRect">
             <a:avLst/>
@@ -7685,57 +8499,14 @@
       </p:sp>
       <p:sp>
         <p:nvSpPr>
-          <p:cNvPr id="10" name="Rectangle 9"/>
-          <p:cNvSpPr/>
-          <p:nvPr/>
-        </p:nvSpPr>
-        <p:spPr>
-          <a:xfrm>
-            <a:off x="4389120" y="1645920"/>
-            <a:ext cx="3383280" cy="91440"/>
-          </a:xfrm>
-          <a:prstGeom prst="rect">
-            <a:avLst/>
-          </a:prstGeom>
-          <a:solidFill>
-            <a:srgbClr val="F59E0B"/>
-          </a:solidFill>
-          <a:ln>
-            <a:noFill/>
-          </a:ln>
-        </p:spPr>
-        <p:style>
-          <a:lnRef idx="1">
-            <a:schemeClr val="accent1"/>
-          </a:lnRef>
-          <a:fillRef idx="3">
-            <a:schemeClr val="accent1"/>
-          </a:fillRef>
-          <a:effectRef idx="2">
-            <a:schemeClr val="accent1"/>
-          </a:effectRef>
-          <a:fontRef idx="minor">
-            <a:schemeClr val="lt1"/>
-          </a:fontRef>
-        </p:style>
-        <p:txBody>
-          <a:bodyPr rtlCol="0" anchor="ctr"/>
-          <a:lstStyle/>
-          <a:p>
-            <a:pPr algn="ctr"/>
-          </a:p>
-        </p:txBody>
-      </p:sp>
-      <p:sp>
-        <p:nvSpPr>
           <p:cNvPr id="11" name="TextBox 10"/>
           <p:cNvSpPr txBox="1"/>
           <p:nvPr/>
         </p:nvSpPr>
         <p:spPr>
           <a:xfrm>
-            <a:off x="4617720" y="1920240"/>
-            <a:ext cx="2926080" cy="4114800"/>
+            <a:off x="6400800" y="2788920"/>
+            <a:ext cx="4846320" cy="3566160"/>
           </a:xfrm>
           <a:prstGeom prst="rect">
             <a:avLst/>
@@ -7749,35 +8520,23 @@
           <a:lstStyle/>
           <a:p>
             <a:pPr>
-              <a:defRPr sz="1400" b="1">
+              <a:spcAft>
+                <a:spcPts val="800"/>
+              </a:spcAft>
+              <a:defRPr sz="1500" b="1">
                 <a:solidFill>
                   <a:srgbClr val="0F172A"/>
                 </a:solidFill>
               </a:defRPr>
             </a:pPr>
             <a:r>
-              <a:t>Embedding Similarity Murni (Vector Only)</a:t>
-            </a:r>
-          </a:p>
-          <a:p>
-            <a:pPr>
-              <a:spcAft>
-                <a:spcPts val="1000"/>
-              </a:spcAft>
-              <a:defRPr sz="1100" b="1">
-                <a:solidFill>
-                  <a:srgbClr val="F59E0B"/>
-                </a:solidFill>
-              </a:defRPr>
-            </a:pPr>
-            <a:r>
-              <a:t>Cepat &amp; Murah, Tapi 'Buta' Narasi</a:t>
-            </a:r>
-          </a:p>
-          <a:p>
-            <a:pPr>
-              <a:spcBef>
-                <a:spcPts val="600"/>
+              <a:t>Nilai Tambah untuk Operasional Manufaktur</a:t>
+            </a:r>
+          </a:p>
+          <a:p>
+            <a:pPr>
+              <a:spcBef>
+                <a:spcPts val="800"/>
               </a:spcBef>
               <a:defRPr sz="1050">
                 <a:solidFill>
@@ -7786,13 +8545,13 @@
               </a:defRPr>
             </a:pPr>
             <a:r>
-              <a:t>•  Kelebihan: Cosine similarity sangat cepat (&lt; 50ms) dan 100% konsisten.</a:t>
-            </a:r>
-          </a:p>
-          <a:p>
-            <a:pPr>
-              <a:spcBef>
-                <a:spcPts val="600"/>
+              <a:t>✔  Kepatuhan Privasi Data On-Premise: n8n di-self-host dalam VPC/intranet pabrik, menjamin data PII pelamar tidak terekspos ke cloud publik.</a:t>
+            </a:r>
+          </a:p>
+          <a:p>
+            <a:pPr>
+              <a:spcBef>
+                <a:spcPts val="800"/>
               </a:spcBef>
               <a:defRPr sz="1050">
                 <a:solidFill>
@@ -7801,13 +8560,13 @@
               </a:defRPr>
             </a:pPr>
             <a:r>
-              <a:t>•  Kelemahan: Tidak mampu memberikan alasan naratif (explainability) bagi HR.</a:t>
-            </a:r>
-          </a:p>
-          <a:p>
-            <a:pPr>
-              <a:spcBef>
-                <a:spcPts val="600"/>
+              <a:t>✔  Separation of Concerns yang Bersih: n8n mengelola integrasi &amp; notifikasi (low-code), sementara model AI dieksekusi terisolasi di modul Python (high-code).</a:t>
+            </a:r>
+          </a:p>
+          <a:p>
+            <a:pPr>
+              <a:spcBef>
+                <a:spcPts val="800"/>
               </a:spcBef>
               <a:defRPr sz="1050">
                 <a:solidFill>
@@ -7816,205 +8575,22 @@
               </a:defRPr>
             </a:pPr>
             <a:r>
-              <a:t>•  Kelemahan: Rentan tertipu 'keyword stuffing' jika kandidat menumpuk kata kunci tanpa relevansi kerja nyata.</a:t>
-            </a:r>
-          </a:p>
-        </p:txBody>
-      </p:sp>
-      <p:sp>
-        <p:nvSpPr>
-          <p:cNvPr id="12" name="Rounded Rectangle 11"/>
-          <p:cNvSpPr/>
-          <p:nvPr/>
-        </p:nvSpPr>
-        <p:spPr>
-          <a:xfrm>
-            <a:off x="8046720" y="1645920"/>
-            <a:ext cx="3383280" cy="4572000"/>
-          </a:xfrm>
-          <a:prstGeom prst="roundRect">
-            <a:avLst/>
-          </a:prstGeom>
-          <a:solidFill>
-            <a:srgbClr val="F8FAFC"/>
-          </a:solidFill>
-          <a:ln w="12700">
-            <a:solidFill>
-              <a:srgbClr val="E2E8F0"/>
-            </a:solidFill>
-          </a:ln>
-        </p:spPr>
-        <p:style>
-          <a:lnRef idx="1">
-            <a:schemeClr val="accent1"/>
-          </a:lnRef>
-          <a:fillRef idx="3">
-            <a:schemeClr val="accent1"/>
-          </a:fillRef>
-          <a:effectRef idx="2">
-            <a:schemeClr val="accent1"/>
-          </a:effectRef>
-          <a:fontRef idx="minor">
-            <a:schemeClr val="lt1"/>
-          </a:fontRef>
-        </p:style>
-        <p:txBody>
-          <a:bodyPr rtlCol="0" anchor="ctr"/>
-          <a:lstStyle/>
-          <a:p>
-            <a:pPr algn="ctr"/>
-          </a:p>
-        </p:txBody>
-      </p:sp>
-      <p:sp>
-        <p:nvSpPr>
-          <p:cNvPr id="13" name="Rectangle 12"/>
-          <p:cNvSpPr/>
-          <p:nvPr/>
-        </p:nvSpPr>
-        <p:spPr>
-          <a:xfrm>
-            <a:off x="8046720" y="1645920"/>
-            <a:ext cx="3383280" cy="91440"/>
-          </a:xfrm>
-          <a:prstGeom prst="rect">
-            <a:avLst/>
-          </a:prstGeom>
-          <a:solidFill>
-            <a:srgbClr val="10B981"/>
-          </a:solidFill>
-          <a:ln>
-            <a:noFill/>
-          </a:ln>
-        </p:spPr>
-        <p:style>
-          <a:lnRef idx="1">
-            <a:schemeClr val="accent1"/>
-          </a:lnRef>
-          <a:fillRef idx="3">
-            <a:schemeClr val="accent1"/>
-          </a:fillRef>
-          <a:effectRef idx="2">
-            <a:schemeClr val="accent1"/>
-          </a:effectRef>
-          <a:fontRef idx="minor">
-            <a:schemeClr val="lt1"/>
-          </a:fontRef>
-        </p:style>
-        <p:txBody>
-          <a:bodyPr rtlCol="0" anchor="ctr"/>
-          <a:lstStyle/>
-          <a:p>
-            <a:pPr algn="ctr"/>
-          </a:p>
-        </p:txBody>
-      </p:sp>
-      <p:sp>
-        <p:nvSpPr>
-          <p:cNvPr id="14" name="TextBox 13"/>
-          <p:cNvSpPr txBox="1"/>
-          <p:nvPr/>
-        </p:nvSpPr>
-        <p:spPr>
-          <a:xfrm>
-            <a:off x="8275320" y="1920240"/>
-            <a:ext cx="2926080" cy="4114800"/>
-          </a:xfrm>
-          <a:prstGeom prst="rect">
-            <a:avLst/>
-          </a:prstGeom>
-          <a:noFill/>
-        </p:spPr>
-        <p:txBody>
-          <a:bodyPr wrap="square">
-            <a:spAutoFit/>
-          </a:bodyPr>
-          <a:lstStyle/>
-          <a:p>
-            <a:pPr>
-              <a:defRPr sz="1400" b="1">
-                <a:solidFill>
-                  <a:srgbClr val="0F172A"/>
-                </a:solidFill>
-              </a:defRPr>
-            </a:pPr>
-            <a:r>
-              <a:t>Pendekatan Hybrid Kami (Best of Both)</a:t>
-            </a:r>
-          </a:p>
-          <a:p>
-            <a:pPr>
-              <a:spcAft>
-                <a:spcPts val="1000"/>
-              </a:spcAft>
-              <a:defRPr sz="1100" b="1">
-                <a:solidFill>
-                  <a:srgbClr val="10B981"/>
-                </a:solidFill>
-              </a:defRPr>
-            </a:pPr>
-            <a:r>
-              <a:t>Optimal: Akurat, Hemat, &amp; Terang</a:t>
-            </a:r>
-          </a:p>
-          <a:p>
-            <a:pPr>
-              <a:spcBef>
-                <a:spcPts val="600"/>
+              <a:t>✔  Kecepatan Respon Kandidat (&lt; 5 Detik): Pelamar unggulan langsung menerima link jadwal wawancara sesaat setelah apply, mencegah kehilangan top talent ke kompetitor.</a:t>
+            </a:r>
+          </a:p>
+          <a:p>
+            <a:pPr>
+              <a:spcBef>
+                <a:spcPts val="800"/>
               </a:spcBef>
               <a:defRPr sz="1050">
                 <a:solidFill>
-                  <a:srgbClr val="0F172A"/>
-                </a:solidFill>
-              </a:defRPr>
-            </a:pPr>
-            <a:r>
-              <a:t>✔  Tahap 1 Hard Filter: Eliminasi deterministik syarat mutlak (Pengalaman, Skill, Pendidikan).</a:t>
-            </a:r>
-          </a:p>
-          <a:p>
-            <a:pPr>
-              <a:spcBef>
-                <a:spcPts val="600"/>
-              </a:spcBef>
-              <a:defRPr sz="1050">
-                <a:solidFill>
-                  <a:srgbClr val="0F172A"/>
-                </a:solidFill>
-              </a:defRPr>
-            </a:pPr>
-            <a:r>
-              <a:t>✔  Tahap 2A Embedding (35%): text-embedding-004 memberikan baseline kesamaan semantik yang konsisten.</a:t>
-            </a:r>
-          </a:p>
-          <a:p>
-            <a:pPr>
-              <a:spcBef>
-                <a:spcPts val="600"/>
-              </a:spcBef>
-              <a:defRPr sz="1050">
-                <a:solidFill>
-                  <a:srgbClr val="0F172A"/>
-                </a:solidFill>
-              </a:defRPr>
-            </a:pPr>
-            <a:r>
-              <a:t>✔  Tahap 2B LLM Reasoning (65%): gemini-2.0-flash menganalisis kekuatan, kekurangan, &amp; narasi pertimbangan.</a:t>
-            </a:r>
-          </a:p>
-          <a:p>
-            <a:pPr>
-              <a:spcBef>
-                <a:spcPts val="600"/>
-              </a:spcBef>
-              <a:defRPr sz="1050">
-                <a:solidFill>
-                  <a:srgbClr val="0F172A"/>
-                </a:solidFill>
-              </a:defRPr>
-            </a:pPr>
-            <a:r>
-              <a:t>✔  Hasil: Hemat biaya 70-75%, bebas variasi acak, dan memberikan audit trail transparan bagi HR.</a:t>
+                  <a:srgbClr val="64748B"/>
+                </a:solidFill>
+              </a:defRPr>
+            </a:pPr>
+            <a:r>
+              <a:t>✔  File Blueprint Siap Produksi: Artifact n8n_cv_screening_workflow.json telah disediakan di repositori, siap langsung di-import ke server pabrik.</a:t>
             </a:r>
           </a:p>
         </p:txBody>
@@ -8145,7 +8721,7 @@
               </a:defRPr>
             </a:pPr>
             <a:r>
-              <a:t>Two-Stage Funnel: Efisiensi Biaya &amp; Standardisasi Skor</a:t>
+              <a:t>Pemilihan Model &amp; Algoritma AI/ML: Mengapa Pendekatan Hybrid?</a:t>
             </a:r>
           </a:p>
         </p:txBody>
@@ -8202,7 +8778,7 @@
         <p:spPr>
           <a:xfrm>
             <a:off x="731520" y="1645920"/>
-            <a:ext cx="5212080" cy="4572000"/>
+            <a:ext cx="3383280" cy="4572000"/>
           </a:xfrm>
           <a:prstGeom prst="roundRect">
             <a:avLst/>
@@ -8240,14 +8816,57 @@
       </p:sp>
       <p:sp>
         <p:nvSpPr>
-          <p:cNvPr id="7" name="TextBox 6"/>
+          <p:cNvPr id="7" name="Rectangle 6"/>
+          <p:cNvSpPr/>
+          <p:nvPr/>
+        </p:nvSpPr>
+        <p:spPr>
+          <a:xfrm>
+            <a:off x="731520" y="1645920"/>
+            <a:ext cx="3383280" cy="91440"/>
+          </a:xfrm>
+          <a:prstGeom prst="rect">
+            <a:avLst/>
+          </a:prstGeom>
+          <a:solidFill>
+            <a:srgbClr val="EF4444"/>
+          </a:solidFill>
+          <a:ln>
+            <a:noFill/>
+          </a:ln>
+        </p:spPr>
+        <p:style>
+          <a:lnRef idx="1">
+            <a:schemeClr val="accent1"/>
+          </a:lnRef>
+          <a:fillRef idx="3">
+            <a:schemeClr val="accent1"/>
+          </a:fillRef>
+          <a:effectRef idx="2">
+            <a:schemeClr val="accent1"/>
+          </a:effectRef>
+          <a:fontRef idx="minor">
+            <a:schemeClr val="lt1"/>
+          </a:fontRef>
+        </p:style>
+        <p:txBody>
+          <a:bodyPr rtlCol="0" anchor="ctr"/>
+          <a:lstStyle/>
+          <a:p>
+            <a:pPr algn="ctr"/>
+          </a:p>
+        </p:txBody>
+      </p:sp>
+      <p:sp>
+        <p:nvSpPr>
+          <p:cNvPr id="8" name="TextBox 7"/>
           <p:cNvSpPr txBox="1"/>
           <p:nvPr/>
         </p:nvSpPr>
         <p:spPr>
           <a:xfrm>
-            <a:off x="1005840" y="1828800"/>
-            <a:ext cx="4663440" cy="4114800"/>
+            <a:off x="960120" y="1920240"/>
+            <a:ext cx="2926080" cy="4114800"/>
           </a:xfrm>
           <a:prstGeom prst="rect">
             <a:avLst/>
@@ -8261,17 +8880,29 @@
           <a:lstStyle/>
           <a:p>
             <a:pPr>
+              <a:defRPr sz="1400" b="1">
+                <a:solidFill>
+                  <a:srgbClr val="0F172A"/>
+                </a:solidFill>
+              </a:defRPr>
+            </a:pPr>
+            <a:r>
+              <a:t>Model LLM Murni (Generative Only)</a:t>
+            </a:r>
+          </a:p>
+          <a:p>
+            <a:pPr>
               <a:spcAft>
                 <a:spcPts val="1000"/>
               </a:spcAft>
-              <a:defRPr sz="1600" b="1">
-                <a:solidFill>
-                  <a:srgbClr val="0369A1"/>
-                </a:solidFill>
-              </a:defRPr>
-            </a:pPr>
-            <a:r>
-              <a:t>Stage 1: Gatekeeper (Hard Filter)</a:t>
+              <a:defRPr sz="1100" b="1">
+                <a:solidFill>
+                  <a:srgbClr val="EF4444"/>
+                </a:solidFill>
+              </a:defRPr>
+            </a:pPr>
+            <a:r>
+              <a:t>Pintar, Namun Mahal &amp; Fluktuatif</a:t>
             </a:r>
           </a:p>
           <a:p>
@@ -8279,14 +8910,14 @@
               <a:spcBef>
                 <a:spcPts val="600"/>
               </a:spcBef>
-              <a:defRPr sz="1150">
+              <a:defRPr sz="1050">
                 <a:solidFill>
                   <a:srgbClr val="64748B"/>
                 </a:solidFill>
               </a:defRPr>
             </a:pPr>
             <a:r>
-              <a:t>Fungsi: Memvalidasi kriteria mutlak yang tidak bisa dikompromikan.</a:t>
+              <a:t>•  Kelebihan: Penalaran kualitatif sangat baik.</a:t>
             </a:r>
           </a:p>
           <a:p>
@@ -8294,14 +8925,14 @@
               <a:spcBef>
                 <a:spcPts val="600"/>
               </a:spcBef>
-              <a:defRPr sz="1150">
+              <a:defRPr sz="1050">
                 <a:solidFill>
                   <a:srgbClr val="64748B"/>
                 </a:solidFill>
               </a:defRPr>
             </a:pPr>
             <a:r>
-              <a:t>Komponen Evaluasi:</a:t>
+              <a:t>•  Kelemahan: Biaya API token membengkak untuk volume ribuan CV.</a:t>
             </a:r>
           </a:p>
           <a:p>
@@ -8309,14 +8940,14 @@
               <a:spcBef>
                 <a:spcPts val="600"/>
               </a:spcBef>
-              <a:defRPr sz="1150">
+              <a:defRPr sz="1050">
                 <a:solidFill>
                   <a:srgbClr val="64748B"/>
                 </a:solidFill>
               </a:defRPr>
             </a:pPr>
             <a:r>
-              <a:t>  1. Minimal Pengalaman Kerja (cth: minimal 2 tahun relevan).</a:t>
+              <a:t>•  Non-deterministik: Ada fluktuasi skor antar-run untuk kandidat yang sama jika temperatur &gt; 0.</a:t>
             </a:r>
           </a:p>
           <a:p>
@@ -8324,73 +8955,28 @@
               <a:spcBef>
                 <a:spcPts val="600"/>
               </a:spcBef>
-              <a:defRPr sz="1150">
+              <a:defRPr sz="1050">
                 <a:solidFill>
                   <a:srgbClr val="64748B"/>
                 </a:solidFill>
               </a:defRPr>
             </a:pPr>
             <a:r>
-              <a:t>  2. Penguasaan Skill Wajib (normalized token &amp; boundary matching).</a:t>
-            </a:r>
-          </a:p>
-          <a:p>
-            <a:pPr>
-              <a:spcBef>
-                <a:spcPts val="600"/>
-              </a:spcBef>
-              <a:defRPr sz="1150">
-                <a:solidFill>
-                  <a:srgbClr val="64748B"/>
-                </a:solidFill>
-              </a:defRPr>
-            </a:pPr>
-            <a:r>
-              <a:t>  3. Jenjang Pendidikan Formal (SMK/SMA &lt; D3 &lt; S1 &lt; S2).</a:t>
-            </a:r>
-          </a:p>
-          <a:p>
-            <a:pPr>
-              <a:spcBef>
-                <a:spcPts val="600"/>
-              </a:spcBef>
-              <a:defRPr sz="1150">
-                <a:solidFill>
-                  <a:srgbClr val="64748B"/>
-                </a:solidFill>
-              </a:defRPr>
-            </a:pPr>
-            <a:r>
-              <a:t>Efisiensi: Pelamar yang tidak memenuhi syarat langsung ditandai 'Gagal Syarat Wajib' beserta catatan kekurangannya.</a:t>
-            </a:r>
-          </a:p>
-          <a:p>
-            <a:pPr>
-              <a:spcBef>
-                <a:spcPts val="600"/>
-              </a:spcBef>
-              <a:defRPr sz="1150">
-                <a:solidFill>
-                  <a:srgbClr val="64748B"/>
-                </a:solidFill>
-              </a:defRPr>
-            </a:pPr>
-            <a:r>
-              <a:t>Dampak Finansial: Memotong 60-75% beban pemrosesan LLM -&gt; Menjamin biaya API tetap terkendali pada volume besar.</a:t>
-            </a:r>
-          </a:p>
-        </p:txBody>
-      </p:sp>
-      <p:sp>
-        <p:nvSpPr>
-          <p:cNvPr id="8" name="Rounded Rectangle 7"/>
+              <a:t>•  Latency tinggi: Tidak efisien untuk filtering awal ribuan pelamar.</a:t>
+            </a:r>
+          </a:p>
+        </p:txBody>
+      </p:sp>
+      <p:sp>
+        <p:nvSpPr>
+          <p:cNvPr id="9" name="Rounded Rectangle 8"/>
           <p:cNvSpPr/>
           <p:nvPr/>
         </p:nvSpPr>
         <p:spPr>
           <a:xfrm>
-            <a:off x="6217920" y="1645920"/>
-            <a:ext cx="5212080" cy="4572000"/>
+            <a:off x="4389120" y="1645920"/>
+            <a:ext cx="3383280" cy="4572000"/>
           </a:xfrm>
           <a:prstGeom prst="roundRect">
             <a:avLst/>
@@ -8428,14 +9014,57 @@
       </p:sp>
       <p:sp>
         <p:nvSpPr>
-          <p:cNvPr id="9" name="TextBox 8"/>
+          <p:cNvPr id="10" name="Rectangle 9"/>
+          <p:cNvSpPr/>
+          <p:nvPr/>
+        </p:nvSpPr>
+        <p:spPr>
+          <a:xfrm>
+            <a:off x="4389120" y="1645920"/>
+            <a:ext cx="3383280" cy="91440"/>
+          </a:xfrm>
+          <a:prstGeom prst="rect">
+            <a:avLst/>
+          </a:prstGeom>
+          <a:solidFill>
+            <a:srgbClr val="F59E0B"/>
+          </a:solidFill>
+          <a:ln>
+            <a:noFill/>
+          </a:ln>
+        </p:spPr>
+        <p:style>
+          <a:lnRef idx="1">
+            <a:schemeClr val="accent1"/>
+          </a:lnRef>
+          <a:fillRef idx="3">
+            <a:schemeClr val="accent1"/>
+          </a:fillRef>
+          <a:effectRef idx="2">
+            <a:schemeClr val="accent1"/>
+          </a:effectRef>
+          <a:fontRef idx="minor">
+            <a:schemeClr val="lt1"/>
+          </a:fontRef>
+        </p:style>
+        <p:txBody>
+          <a:bodyPr rtlCol="0" anchor="ctr"/>
+          <a:lstStyle/>
+          <a:p>
+            <a:pPr algn="ctr"/>
+          </a:p>
+        </p:txBody>
+      </p:sp>
+      <p:sp>
+        <p:nvSpPr>
+          <p:cNvPr id="11" name="TextBox 10"/>
           <p:cNvSpPr txBox="1"/>
           <p:nvPr/>
         </p:nvSpPr>
         <p:spPr>
           <a:xfrm>
-            <a:off x="6492240" y="1828800"/>
-            <a:ext cx="4663440" cy="4114800"/>
+            <a:off x="4617720" y="1920240"/>
+            <a:ext cx="2926080" cy="4114800"/>
           </a:xfrm>
           <a:prstGeom prst="rect">
             <a:avLst/>
@@ -8449,17 +9078,212 @@
           <a:lstStyle/>
           <a:p>
             <a:pPr>
+              <a:defRPr sz="1400" b="1">
+                <a:solidFill>
+                  <a:srgbClr val="0F172A"/>
+                </a:solidFill>
+              </a:defRPr>
+            </a:pPr>
+            <a:r>
+              <a:t>Embedding Similarity Murni (Vector Only)</a:t>
+            </a:r>
+          </a:p>
+          <a:p>
+            <a:pPr>
               <a:spcAft>
                 <a:spcPts val="1000"/>
               </a:spcAft>
-              <a:defRPr sz="1600" b="1">
+              <a:defRPr sz="1100" b="1">
+                <a:solidFill>
+                  <a:srgbClr val="F59E0B"/>
+                </a:solidFill>
+              </a:defRPr>
+            </a:pPr>
+            <a:r>
+              <a:t>Cepat &amp; Murah, Tapi 'Buta' Narasi</a:t>
+            </a:r>
+          </a:p>
+          <a:p>
+            <a:pPr>
+              <a:spcBef>
+                <a:spcPts val="600"/>
+              </a:spcBef>
+              <a:defRPr sz="1050">
+                <a:solidFill>
+                  <a:srgbClr val="64748B"/>
+                </a:solidFill>
+              </a:defRPr>
+            </a:pPr>
+            <a:r>
+              <a:t>•  Kelebihan: Cosine similarity sangat cepat (&lt; 50ms) dan 100% konsisten.</a:t>
+            </a:r>
+          </a:p>
+          <a:p>
+            <a:pPr>
+              <a:spcBef>
+                <a:spcPts val="600"/>
+              </a:spcBef>
+              <a:defRPr sz="1050">
+                <a:solidFill>
+                  <a:srgbClr val="64748B"/>
+                </a:solidFill>
+              </a:defRPr>
+            </a:pPr>
+            <a:r>
+              <a:t>•  Kelemahan: Tidak mampu memberikan alasan naratif (explainability) bagi HR.</a:t>
+            </a:r>
+          </a:p>
+          <a:p>
+            <a:pPr>
+              <a:spcBef>
+                <a:spcPts val="600"/>
+              </a:spcBef>
+              <a:defRPr sz="1050">
+                <a:solidFill>
+                  <a:srgbClr val="64748B"/>
+                </a:solidFill>
+              </a:defRPr>
+            </a:pPr>
+            <a:r>
+              <a:t>•  Kelemahan: Rentan tertipu 'keyword stuffing' jika kandidat menumpuk kata kunci tanpa relevansi kerja nyata.</a:t>
+            </a:r>
+          </a:p>
+        </p:txBody>
+      </p:sp>
+      <p:sp>
+        <p:nvSpPr>
+          <p:cNvPr id="12" name="Rounded Rectangle 11"/>
+          <p:cNvSpPr/>
+          <p:nvPr/>
+        </p:nvSpPr>
+        <p:spPr>
+          <a:xfrm>
+            <a:off x="8046720" y="1645920"/>
+            <a:ext cx="3383280" cy="4572000"/>
+          </a:xfrm>
+          <a:prstGeom prst="roundRect">
+            <a:avLst/>
+          </a:prstGeom>
+          <a:solidFill>
+            <a:srgbClr val="F8FAFC"/>
+          </a:solidFill>
+          <a:ln w="12700">
+            <a:solidFill>
+              <a:srgbClr val="E2E8F0"/>
+            </a:solidFill>
+          </a:ln>
+        </p:spPr>
+        <p:style>
+          <a:lnRef idx="1">
+            <a:schemeClr val="accent1"/>
+          </a:lnRef>
+          <a:fillRef idx="3">
+            <a:schemeClr val="accent1"/>
+          </a:fillRef>
+          <a:effectRef idx="2">
+            <a:schemeClr val="accent1"/>
+          </a:effectRef>
+          <a:fontRef idx="minor">
+            <a:schemeClr val="lt1"/>
+          </a:fontRef>
+        </p:style>
+        <p:txBody>
+          <a:bodyPr rtlCol="0" anchor="ctr"/>
+          <a:lstStyle/>
+          <a:p>
+            <a:pPr algn="ctr"/>
+          </a:p>
+        </p:txBody>
+      </p:sp>
+      <p:sp>
+        <p:nvSpPr>
+          <p:cNvPr id="13" name="Rectangle 12"/>
+          <p:cNvSpPr/>
+          <p:nvPr/>
+        </p:nvSpPr>
+        <p:spPr>
+          <a:xfrm>
+            <a:off x="8046720" y="1645920"/>
+            <a:ext cx="3383280" cy="91440"/>
+          </a:xfrm>
+          <a:prstGeom prst="rect">
+            <a:avLst/>
+          </a:prstGeom>
+          <a:solidFill>
+            <a:srgbClr val="10B981"/>
+          </a:solidFill>
+          <a:ln>
+            <a:noFill/>
+          </a:ln>
+        </p:spPr>
+        <p:style>
+          <a:lnRef idx="1">
+            <a:schemeClr val="accent1"/>
+          </a:lnRef>
+          <a:fillRef idx="3">
+            <a:schemeClr val="accent1"/>
+          </a:fillRef>
+          <a:effectRef idx="2">
+            <a:schemeClr val="accent1"/>
+          </a:effectRef>
+          <a:fontRef idx="minor">
+            <a:schemeClr val="lt1"/>
+          </a:fontRef>
+        </p:style>
+        <p:txBody>
+          <a:bodyPr rtlCol="0" anchor="ctr"/>
+          <a:lstStyle/>
+          <a:p>
+            <a:pPr algn="ctr"/>
+          </a:p>
+        </p:txBody>
+      </p:sp>
+      <p:sp>
+        <p:nvSpPr>
+          <p:cNvPr id="14" name="TextBox 13"/>
+          <p:cNvSpPr txBox="1"/>
+          <p:nvPr/>
+        </p:nvSpPr>
+        <p:spPr>
+          <a:xfrm>
+            <a:off x="8275320" y="1920240"/>
+            <a:ext cx="2926080" cy="4114800"/>
+          </a:xfrm>
+          <a:prstGeom prst="rect">
+            <a:avLst/>
+          </a:prstGeom>
+          <a:noFill/>
+        </p:spPr>
+        <p:txBody>
+          <a:bodyPr wrap="square">
+            <a:spAutoFit/>
+          </a:bodyPr>
+          <a:lstStyle/>
+          <a:p>
+            <a:pPr>
+              <a:defRPr sz="1400" b="1">
                 <a:solidFill>
                   <a:srgbClr val="0F172A"/>
                 </a:solidFill>
               </a:defRPr>
             </a:pPr>
             <a:r>
-              <a:t>Stage 2: Hybrid Scoring &amp; Ranking</a:t>
+              <a:t>Pendekatan Hybrid Kami (Best of Both)</a:t>
+            </a:r>
+          </a:p>
+          <a:p>
+            <a:pPr>
+              <a:spcAft>
+                <a:spcPts val="1000"/>
+              </a:spcAft>
+              <a:defRPr sz="1100" b="1">
+                <a:solidFill>
+                  <a:srgbClr val="10B981"/>
+                </a:solidFill>
+              </a:defRPr>
+            </a:pPr>
+            <a:r>
+              <a:t>Optimal: Akurat, Hemat, &amp; Terang</a:t>
             </a:r>
           </a:p>
           <a:p>
@@ -8467,14 +9291,14 @@
               <a:spcBef>
                 <a:spcPts val="600"/>
               </a:spcBef>
-              <a:defRPr sz="1150">
-                <a:solidFill>
-                  <a:srgbClr val="64748B"/>
-                </a:solidFill>
-              </a:defRPr>
-            </a:pPr>
-            <a:r>
-              <a:t>Fungsi: Menilai kecocokan komprehensif bagi kandidat yang lolos Stage 1.</a:t>
+              <a:defRPr sz="1050">
+                <a:solidFill>
+                  <a:srgbClr val="0F172A"/>
+                </a:solidFill>
+              </a:defRPr>
+            </a:pPr>
+            <a:r>
+              <a:t>✔  Tahap 1 Hard Filter: Eliminasi deterministik syarat mutlak (Pengalaman, Skill, Pendidikan).</a:t>
             </a:r>
           </a:p>
           <a:p>
@@ -8482,14 +9306,14 @@
               <a:spcBef>
                 <a:spcPts val="600"/>
               </a:spcBef>
-              <a:defRPr sz="1150">
-                <a:solidFill>
-                  <a:srgbClr val="64748B"/>
-                </a:solidFill>
-              </a:defRPr>
-            </a:pPr>
-            <a:r>
-              <a:t>Formula Hybrid Scoring:</a:t>
+              <a:defRPr sz="1050">
+                <a:solidFill>
+                  <a:srgbClr val="0F172A"/>
+                </a:solidFill>
+              </a:defRPr>
+            </a:pPr>
+            <a:r>
+              <a:t>✔  Tahap 2A Embedding (35%): text-embedding-004 memberikan baseline kesamaan semantik yang konsisten.</a:t>
             </a:r>
           </a:p>
           <a:p>
@@ -8497,14 +9321,14 @@
               <a:spcBef>
                 <a:spcPts val="600"/>
               </a:spcBef>
-              <a:defRPr sz="1150">
-                <a:solidFill>
-                  <a:srgbClr val="64748B"/>
-                </a:solidFill>
-              </a:defRPr>
-            </a:pPr>
-            <a:r>
-              <a:t>  Skor Akhir = (Embedding Score × 35%) + (LLM Score × 65%)</a:t>
+              <a:defRPr sz="1050">
+                <a:solidFill>
+                  <a:srgbClr val="0F172A"/>
+                </a:solidFill>
+              </a:defRPr>
+            </a:pPr>
+            <a:r>
+              <a:t>✔  Tahap 2B LLM Reasoning (65%): gemini-2.0-flash menganalisis kekuatan, kekurangan, &amp; narasi pertimbangan.</a:t>
             </a:r>
           </a:p>
           <a:p>
@@ -8512,74 +9336,14 @@
               <a:spcBef>
                 <a:spcPts val="600"/>
               </a:spcBef>
-              <a:defRPr sz="1150">
-                <a:solidFill>
-                  <a:srgbClr val="64748B"/>
-                </a:solidFill>
-              </a:defRPr>
-            </a:pPr>
-            <a:r>
-              <a:t>Bobot Embedding (35%):</a:t>
-            </a:r>
-          </a:p>
-          <a:p>
-            <a:pPr>
-              <a:spcBef>
-                <a:spcPts val="600"/>
-              </a:spcBef>
-              <a:defRPr sz="1150">
-                <a:solidFill>
-                  <a:srgbClr val="64748B"/>
-                </a:solidFill>
-              </a:defRPr>
-            </a:pPr>
-            <a:r>
-              <a:t>  Menghitung cosine similarity vektor kandidat vs JD menggunakan model Google text-embedding-004.</a:t>
-            </a:r>
-          </a:p>
-          <a:p>
-            <a:pPr>
-              <a:spcBef>
-                <a:spcPts val="600"/>
-              </a:spcBef>
-              <a:defRPr sz="1150">
-                <a:solidFill>
-                  <a:srgbClr val="64748B"/>
-                </a:solidFill>
-              </a:defRPr>
-            </a:pPr>
-            <a:r>
-              <a:t>Bobot LLM Reasoning (65%):</a:t>
-            </a:r>
-          </a:p>
-          <a:p>
-            <a:pPr>
-              <a:spcBef>
-                <a:spcPts val="600"/>
-              </a:spcBef>
-              <a:defRPr sz="1150">
-                <a:solidFill>
-                  <a:srgbClr val="64748B"/>
-                </a:solidFill>
-              </a:defRPr>
-            </a:pPr>
-            <a:r>
-              <a:t>  Evaluasi mendalam model Gemini Flash pada relevansi portofolio kerja, variasi tanggung jawab, dan kedalaman teknis.</a:t>
-            </a:r>
-          </a:p>
-          <a:p>
-            <a:pPr>
-              <a:spcBef>
-                <a:spcPts val="600"/>
-              </a:spcBef>
-              <a:defRPr sz="1150">
-                <a:solidFill>
-                  <a:srgbClr val="64748B"/>
-                </a:solidFill>
-              </a:defRPr>
-            </a:pPr>
-            <a:r>
-              <a:t>Output Terstruktur: Skor 0-100 + Poin Kekuatan + Poin Kesenjangan + Narasi Keputusan untuk Tim Rekrutmen.</a:t>
+              <a:defRPr sz="1050">
+                <a:solidFill>
+                  <a:srgbClr val="0F172A"/>
+                </a:solidFill>
+              </a:defRPr>
+            </a:pPr>
+            <a:r>
+              <a:t>✔  Hasil: Hemat biaya 70-75%, bebas variasi acak, dan memberikan audit trail transparan bagi HR.</a:t>
             </a:r>
           </a:p>
         </p:txBody>
@@ -8710,7 +9474,7 @@
               </a:defRPr>
             </a:pPr>
             <a:r>
-              <a:t>Pertimbangan Etika, Mitigasi Bias, &amp; Kepatuhan Privasi Data</a:t>
+              <a:t>Two-Stage Funnel: Efisiensi Biaya &amp; Standardisasi Skor</a:t>
             </a:r>
           </a:p>
         </p:txBody>
@@ -8767,7 +9531,7 @@
         <p:spPr>
           <a:xfrm>
             <a:off x="731520" y="1645920"/>
-            <a:ext cx="3383280" cy="4572000"/>
+            <a:ext cx="5212080" cy="4572000"/>
           </a:xfrm>
           <a:prstGeom prst="roundRect">
             <a:avLst/>
@@ -8805,57 +9569,14 @@
       </p:sp>
       <p:sp>
         <p:nvSpPr>
-          <p:cNvPr id="7" name="Rectangle 6"/>
-          <p:cNvSpPr/>
-          <p:nvPr/>
-        </p:nvSpPr>
-        <p:spPr>
-          <a:xfrm>
-            <a:off x="731520" y="1645920"/>
-            <a:ext cx="3383280" cy="91440"/>
-          </a:xfrm>
-          <a:prstGeom prst="rect">
-            <a:avLst/>
-          </a:prstGeom>
-          <a:solidFill>
-            <a:srgbClr val="0EA5E9"/>
-          </a:solidFill>
-          <a:ln>
-            <a:noFill/>
-          </a:ln>
-        </p:spPr>
-        <p:style>
-          <a:lnRef idx="1">
-            <a:schemeClr val="accent1"/>
-          </a:lnRef>
-          <a:fillRef idx="3">
-            <a:schemeClr val="accent1"/>
-          </a:fillRef>
-          <a:effectRef idx="2">
-            <a:schemeClr val="accent1"/>
-          </a:effectRef>
-          <a:fontRef idx="minor">
-            <a:schemeClr val="lt1"/>
-          </a:fontRef>
-        </p:style>
-        <p:txBody>
-          <a:bodyPr rtlCol="0" anchor="ctr"/>
-          <a:lstStyle/>
-          <a:p>
-            <a:pPr algn="ctr"/>
-          </a:p>
-        </p:txBody>
-      </p:sp>
-      <p:sp>
-        <p:nvSpPr>
-          <p:cNvPr id="8" name="TextBox 7"/>
+          <p:cNvPr id="7" name="TextBox 6"/>
           <p:cNvSpPr txBox="1"/>
           <p:nvPr/>
         </p:nvSpPr>
         <p:spPr>
           <a:xfrm>
-            <a:off x="960120" y="1920240"/>
-            <a:ext cx="2926080" cy="4114800"/>
+            <a:off x="1005840" y="1828800"/>
+            <a:ext cx="4663440" cy="4114800"/>
           </a:xfrm>
           <a:prstGeom prst="rect">
             <a:avLst/>
@@ -8869,88 +9590,136 @@
           <a:lstStyle/>
           <a:p>
             <a:pPr>
-              <a:defRPr sz="1400" b="1">
-                <a:solidFill>
-                  <a:srgbClr val="0F172A"/>
-                </a:solidFill>
-              </a:defRPr>
-            </a:pPr>
-            <a:r>
-              <a:t>1. Blind Auditing Framework</a:t>
-            </a:r>
-          </a:p>
-          <a:p>
-            <a:pPr>
               <a:spcAft>
-                <a:spcPts val="1200"/>
+                <a:spcPts val="1000"/>
               </a:spcAft>
-              <a:defRPr sz="1100" b="1">
+              <a:defRPr sz="1600" b="1">
                 <a:solidFill>
                   <a:srgbClr val="0369A1"/>
                 </a:solidFill>
               </a:defRPr>
             </a:pPr>
             <a:r>
-              <a:t>Pemisahan PII dari Engine AI</a:t>
-            </a:r>
-          </a:p>
-          <a:p>
-            <a:pPr>
-              <a:spcBef>
-                <a:spcPts val="800"/>
-              </a:spcBef>
-              <a:defRPr sz="1100">
+              <a:t>Stage 1: Gatekeeper (Hard Filter)</a:t>
+            </a:r>
+          </a:p>
+          <a:p>
+            <a:pPr>
+              <a:spcBef>
+                <a:spcPts val="600"/>
+              </a:spcBef>
+              <a:defRPr sz="1150">
                 <a:solidFill>
                   <a:srgbClr val="64748B"/>
                 </a:solidFill>
               </a:defRPr>
             </a:pPr>
             <a:r>
-              <a:t>•  Identitas kandidat (Nama, Gender, Usia, Agama, Foto, Status Pernikahan, No. Telepon, Email) dipisahkan total sebelum scoring.</a:t>
-            </a:r>
-          </a:p>
-          <a:p>
-            <a:pPr>
-              <a:spcBef>
-                <a:spcPts val="800"/>
-              </a:spcBef>
-              <a:defRPr sz="1100">
+              <a:t>Fungsi: Memvalidasi kriteria mutlak yang tidak bisa dikompromikan.</a:t>
+            </a:r>
+          </a:p>
+          <a:p>
+            <a:pPr>
+              <a:spcBef>
+                <a:spcPts val="600"/>
+              </a:spcBef>
+              <a:defRPr sz="1150">
                 <a:solidFill>
                   <a:srgbClr val="64748B"/>
                 </a:solidFill>
               </a:defRPr>
             </a:pPr>
             <a:r>
-              <a:t>•  Payload yang dikirim ke LLM murni hanya memuat kompetensi kerja, pengalaman terstruktur, dan sertifikasi.</a:t>
-            </a:r>
-          </a:p>
-          <a:p>
-            <a:pPr>
-              <a:spcBef>
-                <a:spcPts val="800"/>
-              </a:spcBef>
-              <a:defRPr sz="1100">
+              <a:t>Komponen Evaluasi:</a:t>
+            </a:r>
+          </a:p>
+          <a:p>
+            <a:pPr>
+              <a:spcBef>
+                <a:spcPts val="600"/>
+              </a:spcBef>
+              <a:defRPr sz="1150">
                 <a:solidFill>
                   <a:srgbClr val="64748B"/>
                 </a:solidFill>
               </a:defRPr>
             </a:pPr>
             <a:r>
-              <a:t>•  Identitas digabungkan kembali HANYA pada tahap pelaporan akhir bagi recruiter.</a:t>
-            </a:r>
-          </a:p>
-        </p:txBody>
-      </p:sp>
-      <p:sp>
-        <p:nvSpPr>
-          <p:cNvPr id="9" name="Rounded Rectangle 8"/>
+              <a:t>  1. Minimal Pengalaman Kerja (cth: minimal 2 tahun relevan).</a:t>
+            </a:r>
+          </a:p>
+          <a:p>
+            <a:pPr>
+              <a:spcBef>
+                <a:spcPts val="600"/>
+              </a:spcBef>
+              <a:defRPr sz="1150">
+                <a:solidFill>
+                  <a:srgbClr val="64748B"/>
+                </a:solidFill>
+              </a:defRPr>
+            </a:pPr>
+            <a:r>
+              <a:t>  2. Penguasaan Skill Wajib (normalized token &amp; boundary matching).</a:t>
+            </a:r>
+          </a:p>
+          <a:p>
+            <a:pPr>
+              <a:spcBef>
+                <a:spcPts val="600"/>
+              </a:spcBef>
+              <a:defRPr sz="1150">
+                <a:solidFill>
+                  <a:srgbClr val="64748B"/>
+                </a:solidFill>
+              </a:defRPr>
+            </a:pPr>
+            <a:r>
+              <a:t>  3. Jenjang Pendidikan Formal (SMK/SMA &lt; D3 &lt; S1 &lt; S2).</a:t>
+            </a:r>
+          </a:p>
+          <a:p>
+            <a:pPr>
+              <a:spcBef>
+                <a:spcPts val="600"/>
+              </a:spcBef>
+              <a:defRPr sz="1150">
+                <a:solidFill>
+                  <a:srgbClr val="64748B"/>
+                </a:solidFill>
+              </a:defRPr>
+            </a:pPr>
+            <a:r>
+              <a:t>Efisiensi: Pelamar yang tidak memenuhi syarat langsung ditandai 'Gagal Syarat Wajib' beserta catatan kekurangannya.</a:t>
+            </a:r>
+          </a:p>
+          <a:p>
+            <a:pPr>
+              <a:spcBef>
+                <a:spcPts val="600"/>
+              </a:spcBef>
+              <a:defRPr sz="1150">
+                <a:solidFill>
+                  <a:srgbClr val="64748B"/>
+                </a:solidFill>
+              </a:defRPr>
+            </a:pPr>
+            <a:r>
+              <a:t>Dampak Finansial: Memotong 60-75% beban pemrosesan LLM -&gt; Menjamin biaya API tetap terkendali pada volume besar.</a:t>
+            </a:r>
+          </a:p>
+        </p:txBody>
+      </p:sp>
+      <p:sp>
+        <p:nvSpPr>
+          <p:cNvPr id="8" name="Rounded Rectangle 7"/>
           <p:cNvSpPr/>
           <p:nvPr/>
         </p:nvSpPr>
         <p:spPr>
           <a:xfrm>
-            <a:off x="4389120" y="1645920"/>
-            <a:ext cx="3383280" cy="4572000"/>
+            <a:off x="6217920" y="1645920"/>
+            <a:ext cx="5212080" cy="4572000"/>
           </a:xfrm>
           <a:prstGeom prst="roundRect">
             <a:avLst/>
@@ -8988,57 +9757,14 @@
       </p:sp>
       <p:sp>
         <p:nvSpPr>
-          <p:cNvPr id="10" name="Rectangle 9"/>
-          <p:cNvSpPr/>
-          <p:nvPr/>
-        </p:nvSpPr>
-        <p:spPr>
-          <a:xfrm>
-            <a:off x="4389120" y="1645920"/>
-            <a:ext cx="3383280" cy="91440"/>
-          </a:xfrm>
-          <a:prstGeom prst="rect">
-            <a:avLst/>
-          </a:prstGeom>
-          <a:solidFill>
-            <a:srgbClr val="0EA5E9"/>
-          </a:solidFill>
-          <a:ln>
-            <a:noFill/>
-          </a:ln>
-        </p:spPr>
-        <p:style>
-          <a:lnRef idx="1">
-            <a:schemeClr val="accent1"/>
-          </a:lnRef>
-          <a:fillRef idx="3">
-            <a:schemeClr val="accent1"/>
-          </a:fillRef>
-          <a:effectRef idx="2">
-            <a:schemeClr val="accent1"/>
-          </a:effectRef>
-          <a:fontRef idx="minor">
-            <a:schemeClr val="lt1"/>
-          </a:fontRef>
-        </p:style>
-        <p:txBody>
-          <a:bodyPr rtlCol="0" anchor="ctr"/>
-          <a:lstStyle/>
-          <a:p>
-            <a:pPr algn="ctr"/>
-          </a:p>
-        </p:txBody>
-      </p:sp>
-      <p:sp>
-        <p:nvSpPr>
-          <p:cNvPr id="11" name="TextBox 10"/>
+          <p:cNvPr id="9" name="TextBox 8"/>
           <p:cNvSpPr txBox="1"/>
           <p:nvPr/>
         </p:nvSpPr>
         <p:spPr>
           <a:xfrm>
-            <a:off x="4617720" y="1920240"/>
-            <a:ext cx="2926080" cy="4114800"/>
+            <a:off x="6492240" y="1828800"/>
+            <a:ext cx="4663440" cy="4114800"/>
           </a:xfrm>
           <a:prstGeom prst="rect">
             <a:avLst/>
@@ -9052,257 +9778,137 @@
           <a:lstStyle/>
           <a:p>
             <a:pPr>
-              <a:defRPr sz="1400" b="1">
+              <a:spcAft>
+                <a:spcPts val="1000"/>
+              </a:spcAft>
+              <a:defRPr sz="1600" b="1">
                 <a:solidFill>
                   <a:srgbClr val="0F172A"/>
                 </a:solidFill>
               </a:defRPr>
             </a:pPr>
             <a:r>
-              <a:t>2. Kepatuhan Regulasi UU PDP</a:t>
-            </a:r>
-          </a:p>
-          <a:p>
-            <a:pPr>
-              <a:spcAft>
-                <a:spcPts val="1200"/>
-              </a:spcAft>
-              <a:defRPr sz="1100" b="1">
-                <a:solidFill>
-                  <a:srgbClr val="0369A1"/>
-                </a:solidFill>
-              </a:defRPr>
-            </a:pPr>
-            <a:r>
-              <a:t>UU No. 27 Tahun 2022</a:t>
-            </a:r>
-          </a:p>
-          <a:p>
-            <a:pPr>
-              <a:spcBef>
-                <a:spcPts val="800"/>
-              </a:spcBef>
-              <a:defRPr sz="1100">
+              <a:t>Stage 2: Hybrid Scoring &amp; Ranking</a:t>
+            </a:r>
+          </a:p>
+          <a:p>
+            <a:pPr>
+              <a:spcBef>
+                <a:spcPts val="600"/>
+              </a:spcBef>
+              <a:defRPr sz="1150">
                 <a:solidFill>
                   <a:srgbClr val="64748B"/>
                 </a:solidFill>
               </a:defRPr>
             </a:pPr>
             <a:r>
-              <a:t>•  Data Minimization: Sistem hanya memproses data yang relevan dengan kualifikasi kerja.</a:t>
-            </a:r>
-          </a:p>
-          <a:p>
-            <a:pPr>
-              <a:spcBef>
-                <a:spcPts val="800"/>
-              </a:spcBef>
-              <a:defRPr sz="1100">
+              <a:t>Fungsi: Menilai kecocokan komprehensif bagi kandidat yang lolos Stage 1.</a:t>
+            </a:r>
+          </a:p>
+          <a:p>
+            <a:pPr>
+              <a:spcBef>
+                <a:spcPts val="600"/>
+              </a:spcBef>
+              <a:defRPr sz="1150">
                 <a:solidFill>
                   <a:srgbClr val="64748B"/>
                 </a:solidFill>
               </a:defRPr>
             </a:pPr>
             <a:r>
-              <a:t>•  Storage Limitation: File CV sementara di-purge otomatis setelah parsing selesai.</a:t>
-            </a:r>
-          </a:p>
-          <a:p>
-            <a:pPr>
-              <a:spcBef>
-                <a:spcPts val="800"/>
-              </a:spcBef>
-              <a:defRPr sz="1100">
+              <a:t>Formula Hybrid Scoring:</a:t>
+            </a:r>
+          </a:p>
+          <a:p>
+            <a:pPr>
+              <a:spcBef>
+                <a:spcPts val="600"/>
+              </a:spcBef>
+              <a:defRPr sz="1150">
                 <a:solidFill>
                   <a:srgbClr val="64748B"/>
                 </a:solidFill>
               </a:defRPr>
             </a:pPr>
             <a:r>
-              <a:t>•  Enkripsi: Data tersimpan dienkripsi in-transit (TLS 1.3) dan at-rest (AES-256) untuk mencegah kebocoran data pelamar.</a:t>
-            </a:r>
-          </a:p>
-        </p:txBody>
-      </p:sp>
-      <p:sp>
-        <p:nvSpPr>
-          <p:cNvPr id="12" name="Rounded Rectangle 11"/>
-          <p:cNvSpPr/>
-          <p:nvPr/>
-        </p:nvSpPr>
-        <p:spPr>
-          <a:xfrm>
-            <a:off x="8046720" y="1645920"/>
-            <a:ext cx="3383280" cy="4572000"/>
-          </a:xfrm>
-          <a:prstGeom prst="roundRect">
-            <a:avLst/>
-          </a:prstGeom>
-          <a:solidFill>
-            <a:srgbClr val="F8FAFC"/>
-          </a:solidFill>
-          <a:ln w="12700">
-            <a:solidFill>
-              <a:srgbClr val="E2E8F0"/>
-            </a:solidFill>
-          </a:ln>
-        </p:spPr>
-        <p:style>
-          <a:lnRef idx="1">
-            <a:schemeClr val="accent1"/>
-          </a:lnRef>
-          <a:fillRef idx="3">
-            <a:schemeClr val="accent1"/>
-          </a:fillRef>
-          <a:effectRef idx="2">
-            <a:schemeClr val="accent1"/>
-          </a:effectRef>
-          <a:fontRef idx="minor">
-            <a:schemeClr val="lt1"/>
-          </a:fontRef>
-        </p:style>
-        <p:txBody>
-          <a:bodyPr rtlCol="0" anchor="ctr"/>
-          <a:lstStyle/>
-          <a:p>
-            <a:pPr algn="ctr"/>
-          </a:p>
-        </p:txBody>
-      </p:sp>
-      <p:sp>
-        <p:nvSpPr>
-          <p:cNvPr id="13" name="Rectangle 12"/>
-          <p:cNvSpPr/>
-          <p:nvPr/>
-        </p:nvSpPr>
-        <p:spPr>
-          <a:xfrm>
-            <a:off x="8046720" y="1645920"/>
-            <a:ext cx="3383280" cy="91440"/>
-          </a:xfrm>
-          <a:prstGeom prst="rect">
-            <a:avLst/>
-          </a:prstGeom>
-          <a:solidFill>
-            <a:srgbClr val="0EA5E9"/>
-          </a:solidFill>
-          <a:ln>
-            <a:noFill/>
-          </a:ln>
-        </p:spPr>
-        <p:style>
-          <a:lnRef idx="1">
-            <a:schemeClr val="accent1"/>
-          </a:lnRef>
-          <a:fillRef idx="3">
-            <a:schemeClr val="accent1"/>
-          </a:fillRef>
-          <a:effectRef idx="2">
-            <a:schemeClr val="accent1"/>
-          </a:effectRef>
-          <a:fontRef idx="minor">
-            <a:schemeClr val="lt1"/>
-          </a:fontRef>
-        </p:style>
-        <p:txBody>
-          <a:bodyPr rtlCol="0" anchor="ctr"/>
-          <a:lstStyle/>
-          <a:p>
-            <a:pPr algn="ctr"/>
-          </a:p>
-        </p:txBody>
-      </p:sp>
-      <p:sp>
-        <p:nvSpPr>
-          <p:cNvPr id="14" name="TextBox 13"/>
-          <p:cNvSpPr txBox="1"/>
-          <p:nvPr/>
-        </p:nvSpPr>
-        <p:spPr>
-          <a:xfrm>
-            <a:off x="8275320" y="1920240"/>
-            <a:ext cx="2926080" cy="4114800"/>
-          </a:xfrm>
-          <a:prstGeom prst="rect">
-            <a:avLst/>
-          </a:prstGeom>
-          <a:noFill/>
-        </p:spPr>
-        <p:txBody>
-          <a:bodyPr wrap="square">
-            <a:spAutoFit/>
-          </a:bodyPr>
-          <a:lstStyle/>
-          <a:p>
-            <a:pPr>
-              <a:defRPr sz="1400" b="1">
-                <a:solidFill>
-                  <a:srgbClr val="0F172A"/>
-                </a:solidFill>
-              </a:defRPr>
-            </a:pPr>
-            <a:r>
-              <a:t>3. Explainable AI &amp; Auditability</a:t>
-            </a:r>
-          </a:p>
-          <a:p>
-            <a:pPr>
-              <a:spcAft>
-                <a:spcPts val="1200"/>
-              </a:spcAft>
-              <a:defRPr sz="1100" b="1">
-                <a:solidFill>
-                  <a:srgbClr val="0369A1"/>
-                </a:solidFill>
-              </a:defRPr>
-            </a:pPr>
-            <a:r>
-              <a:t>Transparansi Keputusan Anti-Blackbox</a:t>
-            </a:r>
-          </a:p>
-          <a:p>
-            <a:pPr>
-              <a:spcBef>
-                <a:spcPts val="800"/>
-              </a:spcBef>
-              <a:defRPr sz="1100">
+              <a:t>  Skor Akhir = (Embedding Score × 35%) + (LLM Score × 65%)</a:t>
+            </a:r>
+          </a:p>
+          <a:p>
+            <a:pPr>
+              <a:spcBef>
+                <a:spcPts val="600"/>
+              </a:spcBef>
+              <a:defRPr sz="1150">
                 <a:solidFill>
                   <a:srgbClr val="64748B"/>
                 </a:solidFill>
               </a:defRPr>
             </a:pPr>
             <a:r>
-              <a:t>•  Setiap keputusan didukung bukti tertulis: Strengths (Kekuatan) dan Gaps (Kekurangan).</a:t>
-            </a:r>
-          </a:p>
-          <a:p>
-            <a:pPr>
-              <a:spcBef>
-                <a:spcPts val="800"/>
-              </a:spcBef>
-              <a:defRPr sz="1100">
+              <a:t>Bobot Embedding (35%):</a:t>
+            </a:r>
+          </a:p>
+          <a:p>
+            <a:pPr>
+              <a:spcBef>
+                <a:spcPts val="600"/>
+              </a:spcBef>
+              <a:defRPr sz="1150">
                 <a:solidFill>
                   <a:srgbClr val="64748B"/>
                 </a:solidFill>
               </a:defRPr>
             </a:pPr>
             <a:r>
-              <a:t>•  Recruiter dapat membaca narasi pertimbangan AI sebelum memutuskan mengundang wawancara.</a:t>
-            </a:r>
-          </a:p>
-          <a:p>
-            <a:pPr>
-              <a:spcBef>
-                <a:spcPts val="800"/>
-              </a:spcBef>
-              <a:defRPr sz="1100">
+              <a:t>  Menghitung cosine similarity vektor kandidat vs JD menggunakan model Google text-embedding-004.</a:t>
+            </a:r>
+          </a:p>
+          <a:p>
+            <a:pPr>
+              <a:spcBef>
+                <a:spcPts val="600"/>
+              </a:spcBef>
+              <a:defRPr sz="1150">
                 <a:solidFill>
                   <a:srgbClr val="64748B"/>
                 </a:solidFill>
               </a:defRPr>
             </a:pPr>
             <a:r>
-              <a:t>•  Menyediakan mekanisme review kedua (Human Review) bagi kandidat dengan status marginal.</a:t>
+              <a:t>Bobot LLM Reasoning (65%):</a:t>
+            </a:r>
+          </a:p>
+          <a:p>
+            <a:pPr>
+              <a:spcBef>
+                <a:spcPts val="600"/>
+              </a:spcBef>
+              <a:defRPr sz="1150">
+                <a:solidFill>
+                  <a:srgbClr val="64748B"/>
+                </a:solidFill>
+              </a:defRPr>
+            </a:pPr>
+            <a:r>
+              <a:t>  Evaluasi mendalam model Gemini Flash pada relevansi portofolio kerja, variasi tanggung jawab, dan kedalaman teknis.</a:t>
+            </a:r>
+          </a:p>
+          <a:p>
+            <a:pPr>
+              <a:spcBef>
+                <a:spcPts val="600"/>
+              </a:spcBef>
+              <a:defRPr sz="1150">
+                <a:solidFill>
+                  <a:srgbClr val="64748B"/>
+                </a:solidFill>
+              </a:defRPr>
+            </a:pPr>
+            <a:r>
+              <a:t>Output Terstruktur: Skor 0-100 + Poin Kekuatan + Poin Kesenjangan + Narasi Keputusan untuk Tim Rekrutmen.</a:t>
             </a:r>
           </a:p>
         </p:txBody>
@@ -9433,7 +10039,7 @@
               </a:defRPr>
             </a:pPr>
             <a:r>
-              <a:t>Kelayakan Implementasi &amp; Skalabilitas di Pabrik Manufaktur</a:t>
+              <a:t>Pertimbangan Etika, Mitigasi Bias, &amp; Kepatuhan Privasi Data</a:t>
             </a:r>
           </a:p>
         </p:txBody>
@@ -9490,7 +10096,7 @@
         <p:spPr>
           <a:xfrm>
             <a:off x="731520" y="1645920"/>
-            <a:ext cx="5212080" cy="4572000"/>
+            <a:ext cx="3383280" cy="4572000"/>
           </a:xfrm>
           <a:prstGeom prst="roundRect">
             <a:avLst/>
@@ -9528,14 +10134,57 @@
       </p:sp>
       <p:sp>
         <p:nvSpPr>
-          <p:cNvPr id="7" name="TextBox 6"/>
+          <p:cNvPr id="7" name="Rectangle 6"/>
+          <p:cNvSpPr/>
+          <p:nvPr/>
+        </p:nvSpPr>
+        <p:spPr>
+          <a:xfrm>
+            <a:off x="731520" y="1645920"/>
+            <a:ext cx="3383280" cy="91440"/>
+          </a:xfrm>
+          <a:prstGeom prst="rect">
+            <a:avLst/>
+          </a:prstGeom>
+          <a:solidFill>
+            <a:srgbClr val="0EA5E9"/>
+          </a:solidFill>
+          <a:ln>
+            <a:noFill/>
+          </a:ln>
+        </p:spPr>
+        <p:style>
+          <a:lnRef idx="1">
+            <a:schemeClr val="accent1"/>
+          </a:lnRef>
+          <a:fillRef idx="3">
+            <a:schemeClr val="accent1"/>
+          </a:fillRef>
+          <a:effectRef idx="2">
+            <a:schemeClr val="accent1"/>
+          </a:effectRef>
+          <a:fontRef idx="minor">
+            <a:schemeClr val="lt1"/>
+          </a:fontRef>
+        </p:style>
+        <p:txBody>
+          <a:bodyPr rtlCol="0" anchor="ctr"/>
+          <a:lstStyle/>
+          <a:p>
+            <a:pPr algn="ctr"/>
+          </a:p>
+        </p:txBody>
+      </p:sp>
+      <p:sp>
+        <p:nvSpPr>
+          <p:cNvPr id="8" name="TextBox 7"/>
           <p:cNvSpPr txBox="1"/>
           <p:nvPr/>
         </p:nvSpPr>
         <p:spPr>
           <a:xfrm>
-            <a:off x="1005840" y="1828800"/>
-            <a:ext cx="4663440" cy="4114800"/>
+            <a:off x="960120" y="1920240"/>
+            <a:ext cx="2926080" cy="4114800"/>
           </a:xfrm>
           <a:prstGeom prst="rect">
             <a:avLst/>
@@ -9549,17 +10198,29 @@
           <a:lstStyle/>
           <a:p>
             <a:pPr>
+              <a:defRPr sz="1400" b="1">
+                <a:solidFill>
+                  <a:srgbClr val="0F172A"/>
+                </a:solidFill>
+              </a:defRPr>
+            </a:pPr>
+            <a:r>
+              <a:t>1. Blind Auditing Framework</a:t>
+            </a:r>
+          </a:p>
+          <a:p>
+            <a:pPr>
               <a:spcAft>
-                <a:spcPts val="1000"/>
+                <a:spcPts val="1200"/>
               </a:spcAft>
-              <a:defRPr sz="1600" b="1">
-                <a:solidFill>
-                  <a:srgbClr val="0F172A"/>
-                </a:solidFill>
-              </a:defRPr>
-            </a:pPr>
-            <a:r>
-              <a:t>Arsitektur Produksi Skala Enterprise</a:t>
+              <a:defRPr sz="1100" b="1">
+                <a:solidFill>
+                  <a:srgbClr val="0369A1"/>
+                </a:solidFill>
+              </a:defRPr>
+            </a:pPr>
+            <a:r>
+              <a:t>Pemisahan PII dari Engine AI</a:t>
             </a:r>
           </a:p>
           <a:p>
@@ -9567,14 +10228,14 @@
               <a:spcBef>
                 <a:spcPts val="800"/>
               </a:spcBef>
-              <a:defRPr sz="1150">
+              <a:defRPr sz="1100">
                 <a:solidFill>
                   <a:srgbClr val="64748B"/>
                 </a:solidFill>
               </a:defRPr>
             </a:pPr>
             <a:r>
-              <a:t>✔  Asynchronous Job Queue: Memanfaatkan RabbitMQ / Redis Queue / Celery untuk memproses ribuan CV secara batch tanpa membuat server web freeze.</a:t>
+              <a:t>•  Identitas kandidat (Nama, Gender, Usia, Agama, Foto, Status Pernikahan, No. Telepon, Email) dipisahkan total sebelum scoring.</a:t>
             </a:r>
           </a:p>
           <a:p>
@@ -9582,14 +10243,14 @@
               <a:spcBef>
                 <a:spcPts val="800"/>
               </a:spcBef>
-              <a:defRPr sz="1150">
+              <a:defRPr sz="1100">
                 <a:solidFill>
                   <a:srgbClr val="64748B"/>
                 </a:solidFill>
               </a:defRPr>
             </a:pPr>
             <a:r>
-              <a:t>✔  Microservices Architecture: Parser service, embedding worker, dan LLM worker berjalan terpisah dalam container Docker yang mudah di-scale horizontal.</a:t>
+              <a:t>•  Payload yang dikirim ke LLM murni hanya memuat kompetensi kerja, pengalaman terstruktur, dan sertifikasi.</a:t>
             </a:r>
           </a:p>
           <a:p>
@@ -9597,43 +10258,28 @@
               <a:spcBef>
                 <a:spcPts val="800"/>
               </a:spcBef>
-              <a:defRPr sz="1150">
+              <a:defRPr sz="1100">
                 <a:solidFill>
                   <a:srgbClr val="64748B"/>
                 </a:solidFill>
               </a:defRPr>
             </a:pPr>
             <a:r>
-              <a:t>✔  Vector Database Terdistribusi: Qdrant / Milvus / PGVector untuk menyimpan jutaan profil bakat pabrik dan mendukung pencarian semantik instan.</a:t>
-            </a:r>
-          </a:p>
-          <a:p>
-            <a:pPr>
-              <a:spcBef>
-                <a:spcPts val="800"/>
-              </a:spcBef>
-              <a:defRPr sz="1150">
-                <a:solidFill>
-                  <a:srgbClr val="64748B"/>
-                </a:solidFill>
-              </a:defRPr>
-            </a:pPr>
-            <a:r>
-              <a:t>✔  High-Throughput Concurrency: Mampu memproses &gt; 10.000 CV per jam saat rekrutmen massal pembukaan pabrik baru.</a:t>
-            </a:r>
-          </a:p>
-        </p:txBody>
-      </p:sp>
-      <p:sp>
-        <p:nvSpPr>
-          <p:cNvPr id="8" name="Rounded Rectangle 7"/>
+              <a:t>•  Identitas digabungkan kembali HANYA pada tahap pelaporan akhir bagi recruiter.</a:t>
+            </a:r>
+          </a:p>
+        </p:txBody>
+      </p:sp>
+      <p:sp>
+        <p:nvSpPr>
+          <p:cNvPr id="9" name="Rounded Rectangle 8"/>
           <p:cNvSpPr/>
           <p:nvPr/>
         </p:nvSpPr>
         <p:spPr>
           <a:xfrm>
-            <a:off x="6217920" y="1645920"/>
-            <a:ext cx="5212080" cy="4572000"/>
+            <a:off x="4389120" y="1645920"/>
+            <a:ext cx="3383280" cy="4572000"/>
           </a:xfrm>
           <a:prstGeom prst="roundRect">
             <a:avLst/>
@@ -9671,14 +10317,57 @@
       </p:sp>
       <p:sp>
         <p:nvSpPr>
-          <p:cNvPr id="9" name="TextBox 8"/>
+          <p:cNvPr id="10" name="Rectangle 9"/>
+          <p:cNvSpPr/>
+          <p:nvPr/>
+        </p:nvSpPr>
+        <p:spPr>
+          <a:xfrm>
+            <a:off x="4389120" y="1645920"/>
+            <a:ext cx="3383280" cy="91440"/>
+          </a:xfrm>
+          <a:prstGeom prst="rect">
+            <a:avLst/>
+          </a:prstGeom>
+          <a:solidFill>
+            <a:srgbClr val="0EA5E9"/>
+          </a:solidFill>
+          <a:ln>
+            <a:noFill/>
+          </a:ln>
+        </p:spPr>
+        <p:style>
+          <a:lnRef idx="1">
+            <a:schemeClr val="accent1"/>
+          </a:lnRef>
+          <a:fillRef idx="3">
+            <a:schemeClr val="accent1"/>
+          </a:fillRef>
+          <a:effectRef idx="2">
+            <a:schemeClr val="accent1"/>
+          </a:effectRef>
+          <a:fontRef idx="minor">
+            <a:schemeClr val="lt1"/>
+          </a:fontRef>
+        </p:style>
+        <p:txBody>
+          <a:bodyPr rtlCol="0" anchor="ctr"/>
+          <a:lstStyle/>
+          <a:p>
+            <a:pPr algn="ctr"/>
+          </a:p>
+        </p:txBody>
+      </p:sp>
+      <p:sp>
+        <p:nvSpPr>
+          <p:cNvPr id="11" name="TextBox 10"/>
           <p:cNvSpPr txBox="1"/>
           <p:nvPr/>
         </p:nvSpPr>
         <p:spPr>
           <a:xfrm>
-            <a:off x="6492240" y="1828800"/>
-            <a:ext cx="4663440" cy="4114800"/>
+            <a:off x="4617720" y="1920240"/>
+            <a:ext cx="2926080" cy="4114800"/>
           </a:xfrm>
           <a:prstGeom prst="rect">
             <a:avLst/>
@@ -9692,62 +10381,257 @@
           <a:lstStyle/>
           <a:p>
             <a:pPr>
+              <a:defRPr sz="1400" b="1">
+                <a:solidFill>
+                  <a:srgbClr val="0F172A"/>
+                </a:solidFill>
+              </a:defRPr>
+            </a:pPr>
+            <a:r>
+              <a:t>2. Kepatuhan Regulasi UU PDP</a:t>
+            </a:r>
+          </a:p>
+          <a:p>
+            <a:pPr>
               <a:spcAft>
-                <a:spcPts val="1000"/>
+                <a:spcPts val="1200"/>
               </a:spcAft>
-              <a:defRPr sz="1600" b="1">
+              <a:defRPr sz="1100" b="1">
                 <a:solidFill>
                   <a:srgbClr val="0369A1"/>
                 </a:solidFill>
               </a:defRPr>
             </a:pPr>
             <a:r>
-              <a:t>Human-in-the-Loop &amp; Adaptabilitas Pabrik</a:t>
-            </a:r>
-          </a:p>
-          <a:p>
-            <a:pPr>
-              <a:spcBef>
-                <a:spcPts val="1000"/>
-              </a:spcBef>
-              <a:defRPr sz="1150">
+              <a:t>UU No. 27 Tahun 2022</a:t>
+            </a:r>
+          </a:p>
+          <a:p>
+            <a:pPr>
+              <a:spcBef>
+                <a:spcPts val="800"/>
+              </a:spcBef>
+              <a:defRPr sz="1100">
                 <a:solidFill>
                   <a:srgbClr val="64748B"/>
                 </a:solidFill>
               </a:defRPr>
             </a:pPr>
             <a:r>
-              <a:t>✔  AI Sebagai Co-Pilot Cerdas: Sistem menyaring dan menyusun peringkat; keputusan final wawancara tetap berada di tangan Recruiter &amp; Line Manager.</a:t>
-            </a:r>
-          </a:p>
-          <a:p>
-            <a:pPr>
-              <a:spcBef>
-                <a:spcPts val="1000"/>
-              </a:spcBef>
-              <a:defRPr sz="1150">
+              <a:t>•  Data Minimization: Sistem hanya memproses data yang relevan dengan kualifikasi kerja.</a:t>
+            </a:r>
+          </a:p>
+          <a:p>
+            <a:pPr>
+              <a:spcBef>
+                <a:spcPts val="800"/>
+              </a:spcBef>
+              <a:defRPr sz="1100">
                 <a:solidFill>
                   <a:srgbClr val="64748B"/>
                 </a:solidFill>
               </a:defRPr>
             </a:pPr>
             <a:r>
-              <a:t>✔  Dukungan Ragam Posisi Manufaktur: Fleksibel mengevaluasi Plant CAD Drafter, Automation Engineer, PLC Specialist, Operator Produksi, hingga Staff PPIC &amp; QC.</a:t>
-            </a:r>
-          </a:p>
-          <a:p>
-            <a:pPr>
-              <a:spcBef>
-                <a:spcPts val="1000"/>
-              </a:spcBef>
-              <a:defRPr sz="1150">
+              <a:t>•  Storage Limitation: File CV sementara di-purge otomatis setelah parsing selesai.</a:t>
+            </a:r>
+          </a:p>
+          <a:p>
+            <a:pPr>
+              <a:spcBef>
+                <a:spcPts val="800"/>
+              </a:spcBef>
+              <a:defRPr sz="1100">
                 <a:solidFill>
                   <a:srgbClr val="64748B"/>
                 </a:solidFill>
               </a:defRPr>
             </a:pPr>
             <a:r>
-              <a:t>✔  Integrasi HRIS &amp; Mesin Presensi: REST API mudah disambungkan ke HRIS internal pabrik untuk penjadwalan wawancara dan onboarding otomatis.</a:t>
+              <a:t>•  Enkripsi: Data tersimpan dienkripsi in-transit (TLS 1.3) dan at-rest (AES-256) untuk mencegah kebocoran data pelamar.</a:t>
+            </a:r>
+          </a:p>
+        </p:txBody>
+      </p:sp>
+      <p:sp>
+        <p:nvSpPr>
+          <p:cNvPr id="12" name="Rounded Rectangle 11"/>
+          <p:cNvSpPr/>
+          <p:nvPr/>
+        </p:nvSpPr>
+        <p:spPr>
+          <a:xfrm>
+            <a:off x="8046720" y="1645920"/>
+            <a:ext cx="3383280" cy="4572000"/>
+          </a:xfrm>
+          <a:prstGeom prst="roundRect">
+            <a:avLst/>
+          </a:prstGeom>
+          <a:solidFill>
+            <a:srgbClr val="F8FAFC"/>
+          </a:solidFill>
+          <a:ln w="12700">
+            <a:solidFill>
+              <a:srgbClr val="E2E8F0"/>
+            </a:solidFill>
+          </a:ln>
+        </p:spPr>
+        <p:style>
+          <a:lnRef idx="1">
+            <a:schemeClr val="accent1"/>
+          </a:lnRef>
+          <a:fillRef idx="3">
+            <a:schemeClr val="accent1"/>
+          </a:fillRef>
+          <a:effectRef idx="2">
+            <a:schemeClr val="accent1"/>
+          </a:effectRef>
+          <a:fontRef idx="minor">
+            <a:schemeClr val="lt1"/>
+          </a:fontRef>
+        </p:style>
+        <p:txBody>
+          <a:bodyPr rtlCol="0" anchor="ctr"/>
+          <a:lstStyle/>
+          <a:p>
+            <a:pPr algn="ctr"/>
+          </a:p>
+        </p:txBody>
+      </p:sp>
+      <p:sp>
+        <p:nvSpPr>
+          <p:cNvPr id="13" name="Rectangle 12"/>
+          <p:cNvSpPr/>
+          <p:nvPr/>
+        </p:nvSpPr>
+        <p:spPr>
+          <a:xfrm>
+            <a:off x="8046720" y="1645920"/>
+            <a:ext cx="3383280" cy="91440"/>
+          </a:xfrm>
+          <a:prstGeom prst="rect">
+            <a:avLst/>
+          </a:prstGeom>
+          <a:solidFill>
+            <a:srgbClr val="0EA5E9"/>
+          </a:solidFill>
+          <a:ln>
+            <a:noFill/>
+          </a:ln>
+        </p:spPr>
+        <p:style>
+          <a:lnRef idx="1">
+            <a:schemeClr val="accent1"/>
+          </a:lnRef>
+          <a:fillRef idx="3">
+            <a:schemeClr val="accent1"/>
+          </a:fillRef>
+          <a:effectRef idx="2">
+            <a:schemeClr val="accent1"/>
+          </a:effectRef>
+          <a:fontRef idx="minor">
+            <a:schemeClr val="lt1"/>
+          </a:fontRef>
+        </p:style>
+        <p:txBody>
+          <a:bodyPr rtlCol="0" anchor="ctr"/>
+          <a:lstStyle/>
+          <a:p>
+            <a:pPr algn="ctr"/>
+          </a:p>
+        </p:txBody>
+      </p:sp>
+      <p:sp>
+        <p:nvSpPr>
+          <p:cNvPr id="14" name="TextBox 13"/>
+          <p:cNvSpPr txBox="1"/>
+          <p:nvPr/>
+        </p:nvSpPr>
+        <p:spPr>
+          <a:xfrm>
+            <a:off x="8275320" y="1920240"/>
+            <a:ext cx="2926080" cy="4114800"/>
+          </a:xfrm>
+          <a:prstGeom prst="rect">
+            <a:avLst/>
+          </a:prstGeom>
+          <a:noFill/>
+        </p:spPr>
+        <p:txBody>
+          <a:bodyPr wrap="square">
+            <a:spAutoFit/>
+          </a:bodyPr>
+          <a:lstStyle/>
+          <a:p>
+            <a:pPr>
+              <a:defRPr sz="1400" b="1">
+                <a:solidFill>
+                  <a:srgbClr val="0F172A"/>
+                </a:solidFill>
+              </a:defRPr>
+            </a:pPr>
+            <a:r>
+              <a:t>3. Explainable AI &amp; Auditability</a:t>
+            </a:r>
+          </a:p>
+          <a:p>
+            <a:pPr>
+              <a:spcAft>
+                <a:spcPts val="1200"/>
+              </a:spcAft>
+              <a:defRPr sz="1100" b="1">
+                <a:solidFill>
+                  <a:srgbClr val="0369A1"/>
+                </a:solidFill>
+              </a:defRPr>
+            </a:pPr>
+            <a:r>
+              <a:t>Transparansi Keputusan Anti-Blackbox</a:t>
+            </a:r>
+          </a:p>
+          <a:p>
+            <a:pPr>
+              <a:spcBef>
+                <a:spcPts val="800"/>
+              </a:spcBef>
+              <a:defRPr sz="1100">
+                <a:solidFill>
+                  <a:srgbClr val="64748B"/>
+                </a:solidFill>
+              </a:defRPr>
+            </a:pPr>
+            <a:r>
+              <a:t>•  Setiap keputusan didukung bukti tertulis: Strengths (Kekuatan) dan Gaps (Kekurangan).</a:t>
+            </a:r>
+          </a:p>
+          <a:p>
+            <a:pPr>
+              <a:spcBef>
+                <a:spcPts val="800"/>
+              </a:spcBef>
+              <a:defRPr sz="1100">
+                <a:solidFill>
+                  <a:srgbClr val="64748B"/>
+                </a:solidFill>
+              </a:defRPr>
+            </a:pPr>
+            <a:r>
+              <a:t>•  Recruiter dapat membaca narasi pertimbangan AI sebelum memutuskan mengundang wawancara.</a:t>
+            </a:r>
+          </a:p>
+          <a:p>
+            <a:pPr>
+              <a:spcBef>
+                <a:spcPts val="800"/>
+              </a:spcBef>
+              <a:defRPr sz="1100">
+                <a:solidFill>
+                  <a:srgbClr val="64748B"/>
+                </a:solidFill>
+              </a:defRPr>
+            </a:pPr>
+            <a:r>
+              <a:t>•  Menyediakan mekanisme review kedua (Human Review) bagi kandidat dengan status marginal.</a:t>
             </a:r>
           </a:p>
         </p:txBody>
@@ -9878,7 +10762,7 @@
               </a:defRPr>
             </a:pPr>
             <a:r>
-              <a:t>Analisis Efisiensi, Reduksi Biaya, &amp; Dampak Bisnis (ROI)</a:t>
+              <a:t>Kelayakan Implementasi &amp; Skalabilitas di Pabrik Manufaktur</a:t>
             </a:r>
           </a:p>
         </p:txBody>
@@ -9935,447 +10819,7 @@
         <p:spPr>
           <a:xfrm>
             <a:off x="731520" y="1645920"/>
-            <a:ext cx="2606040" cy="2011680"/>
-          </a:xfrm>
-          <a:prstGeom prst="roundRect">
-            <a:avLst/>
-          </a:prstGeom>
-          <a:solidFill>
-            <a:srgbClr val="E0F2FE"/>
-          </a:solidFill>
-          <a:ln w="12700">
-            <a:solidFill>
-              <a:srgbClr val="0EA5E9"/>
-            </a:solidFill>
-          </a:ln>
-        </p:spPr>
-        <p:style>
-          <a:lnRef idx="1">
-            <a:schemeClr val="accent1"/>
-          </a:lnRef>
-          <a:fillRef idx="3">
-            <a:schemeClr val="accent1"/>
-          </a:fillRef>
-          <a:effectRef idx="2">
-            <a:schemeClr val="accent1"/>
-          </a:effectRef>
-          <a:fontRef idx="minor">
-            <a:schemeClr val="lt1"/>
-          </a:fontRef>
-        </p:style>
-        <p:txBody>
-          <a:bodyPr rtlCol="0" anchor="ctr"/>
-          <a:lstStyle/>
-          <a:p>
-            <a:pPr algn="ctr"/>
-          </a:p>
-        </p:txBody>
-      </p:sp>
-      <p:sp>
-        <p:nvSpPr>
-          <p:cNvPr id="7" name="TextBox 6"/>
-          <p:cNvSpPr txBox="1"/>
-          <p:nvPr/>
-        </p:nvSpPr>
-        <p:spPr>
-          <a:xfrm>
-            <a:off x="868680" y="1737360"/>
-            <a:ext cx="2331720" cy="1828800"/>
-          </a:xfrm>
-          <a:prstGeom prst="rect">
-            <a:avLst/>
-          </a:prstGeom>
-          <a:noFill/>
-        </p:spPr>
-        <p:txBody>
-          <a:bodyPr wrap="square">
-            <a:spAutoFit/>
-          </a:bodyPr>
-          <a:lstStyle/>
-          <a:p>
-            <a:pPr>
-              <a:defRPr sz="3200" b="1">
-                <a:solidFill>
-                  <a:srgbClr val="0369A1"/>
-                </a:solidFill>
-              </a:defRPr>
-            </a:pPr>
-            <a:r>
-              <a:t>95%</a:t>
-            </a:r>
-          </a:p>
-          <a:p>
-            <a:pPr>
-              <a:spcBef>
-                <a:spcPts val="400"/>
-              </a:spcBef>
-              <a:defRPr sz="1300" b="1">
-                <a:solidFill>
-                  <a:srgbClr val="0F172A"/>
-                </a:solidFill>
-              </a:defRPr>
-            </a:pPr>
-            <a:r>
-              <a:t>Efisiensi Waktu</a:t>
-            </a:r>
-          </a:p>
-          <a:p>
-            <a:pPr>
-              <a:spcBef>
-                <a:spcPts val="400"/>
-              </a:spcBef>
-              <a:defRPr sz="1000">
-                <a:solidFill>
-                  <a:srgbClr val="64748B"/>
-                </a:solidFill>
-              </a:defRPr>
-            </a:pPr>
-            <a:r>
-              <a:t>Screening 1.000 CV turun dari 50 jam kerja menjadi &lt; 15 menit pemrosesan otomatis.</a:t>
-            </a:r>
-          </a:p>
-        </p:txBody>
-      </p:sp>
-      <p:sp>
-        <p:nvSpPr>
-          <p:cNvPr id="8" name="Rounded Rectangle 7"/>
-          <p:cNvSpPr/>
-          <p:nvPr/>
-        </p:nvSpPr>
-        <p:spPr>
-          <a:xfrm>
-            <a:off x="3429000" y="1645920"/>
-            <a:ext cx="2606040" cy="2011680"/>
-          </a:xfrm>
-          <a:prstGeom prst="roundRect">
-            <a:avLst/>
-          </a:prstGeom>
-          <a:solidFill>
-            <a:srgbClr val="E0F2FE"/>
-          </a:solidFill>
-          <a:ln w="12700">
-            <a:solidFill>
-              <a:srgbClr val="0EA5E9"/>
-            </a:solidFill>
-          </a:ln>
-        </p:spPr>
-        <p:style>
-          <a:lnRef idx="1">
-            <a:schemeClr val="accent1"/>
-          </a:lnRef>
-          <a:fillRef idx="3">
-            <a:schemeClr val="accent1"/>
-          </a:fillRef>
-          <a:effectRef idx="2">
-            <a:schemeClr val="accent1"/>
-          </a:effectRef>
-          <a:fontRef idx="minor">
-            <a:schemeClr val="lt1"/>
-          </a:fontRef>
-        </p:style>
-        <p:txBody>
-          <a:bodyPr rtlCol="0" anchor="ctr"/>
-          <a:lstStyle/>
-          <a:p>
-            <a:pPr algn="ctr"/>
-          </a:p>
-        </p:txBody>
-      </p:sp>
-      <p:sp>
-        <p:nvSpPr>
-          <p:cNvPr id="9" name="TextBox 8"/>
-          <p:cNvSpPr txBox="1"/>
-          <p:nvPr/>
-        </p:nvSpPr>
-        <p:spPr>
-          <a:xfrm>
-            <a:off x="3566160" y="1737360"/>
-            <a:ext cx="2331720" cy="1828800"/>
-          </a:xfrm>
-          <a:prstGeom prst="rect">
-            <a:avLst/>
-          </a:prstGeom>
-          <a:noFill/>
-        </p:spPr>
-        <p:txBody>
-          <a:bodyPr wrap="square">
-            <a:spAutoFit/>
-          </a:bodyPr>
-          <a:lstStyle/>
-          <a:p>
-            <a:pPr>
-              <a:defRPr sz="3200" b="1">
-                <a:solidFill>
-                  <a:srgbClr val="0369A1"/>
-                </a:solidFill>
-              </a:defRPr>
-            </a:pPr>
-            <a:r>
-              <a:t>75%</a:t>
-            </a:r>
-          </a:p>
-          <a:p>
-            <a:pPr>
-              <a:spcBef>
-                <a:spcPts val="400"/>
-              </a:spcBef>
-              <a:defRPr sz="1300" b="1">
-                <a:solidFill>
-                  <a:srgbClr val="0F172A"/>
-                </a:solidFill>
-              </a:defRPr>
-            </a:pPr>
-            <a:r>
-              <a:t>Penghematan Biaya</a:t>
-            </a:r>
-          </a:p>
-          <a:p>
-            <a:pPr>
-              <a:spcBef>
-                <a:spcPts val="400"/>
-              </a:spcBef>
-              <a:defRPr sz="1000">
-                <a:solidFill>
-                  <a:srgbClr val="64748B"/>
-                </a:solidFill>
-              </a:defRPr>
-            </a:pPr>
-            <a:r>
-              <a:t>Mengurangi biaya lembur rekruter &amp; mengeliminasi ketergantungan pada agensi rekrutmen pihak ketiga.</a:t>
-            </a:r>
-          </a:p>
-        </p:txBody>
-      </p:sp>
-      <p:sp>
-        <p:nvSpPr>
-          <p:cNvPr id="10" name="Rounded Rectangle 9"/>
-          <p:cNvSpPr/>
-          <p:nvPr/>
-        </p:nvSpPr>
-        <p:spPr>
-          <a:xfrm>
-            <a:off x="6126480" y="1645920"/>
-            <a:ext cx="2606040" cy="2011680"/>
-          </a:xfrm>
-          <a:prstGeom prst="roundRect">
-            <a:avLst/>
-          </a:prstGeom>
-          <a:solidFill>
-            <a:srgbClr val="E0F2FE"/>
-          </a:solidFill>
-          <a:ln w="12700">
-            <a:solidFill>
-              <a:srgbClr val="0EA5E9"/>
-            </a:solidFill>
-          </a:ln>
-        </p:spPr>
-        <p:style>
-          <a:lnRef idx="1">
-            <a:schemeClr val="accent1"/>
-          </a:lnRef>
-          <a:fillRef idx="3">
-            <a:schemeClr val="accent1"/>
-          </a:fillRef>
-          <a:effectRef idx="2">
-            <a:schemeClr val="accent1"/>
-          </a:effectRef>
-          <a:fontRef idx="minor">
-            <a:schemeClr val="lt1"/>
-          </a:fontRef>
-        </p:style>
-        <p:txBody>
-          <a:bodyPr rtlCol="0" anchor="ctr"/>
-          <a:lstStyle/>
-          <a:p>
-            <a:pPr algn="ctr"/>
-          </a:p>
-        </p:txBody>
-      </p:sp>
-      <p:sp>
-        <p:nvSpPr>
-          <p:cNvPr id="11" name="TextBox 10"/>
-          <p:cNvSpPr txBox="1"/>
-          <p:nvPr/>
-        </p:nvSpPr>
-        <p:spPr>
-          <a:xfrm>
-            <a:off x="6263640" y="1737360"/>
-            <a:ext cx="2331720" cy="1828800"/>
-          </a:xfrm>
-          <a:prstGeom prst="rect">
-            <a:avLst/>
-          </a:prstGeom>
-          <a:noFill/>
-        </p:spPr>
-        <p:txBody>
-          <a:bodyPr wrap="square">
-            <a:spAutoFit/>
-          </a:bodyPr>
-          <a:lstStyle/>
-          <a:p>
-            <a:pPr>
-              <a:defRPr sz="3200" b="1">
-                <a:solidFill>
-                  <a:srgbClr val="0369A1"/>
-                </a:solidFill>
-              </a:defRPr>
-            </a:pPr>
-            <a:r>
-              <a:t>3 Hari</a:t>
-            </a:r>
-          </a:p>
-          <a:p>
-            <a:pPr>
-              <a:spcBef>
-                <a:spcPts val="400"/>
-              </a:spcBef>
-              <a:defRPr sz="1300" b="1">
-                <a:solidFill>
-                  <a:srgbClr val="0F172A"/>
-                </a:solidFill>
-              </a:defRPr>
-            </a:pPr>
-            <a:r>
-              <a:t>Time-to-Hire</a:t>
-            </a:r>
-          </a:p>
-          <a:p>
-            <a:pPr>
-              <a:spcBef>
-                <a:spcPts val="400"/>
-              </a:spcBef>
-              <a:defRPr sz="1000">
-                <a:solidFill>
-                  <a:srgbClr val="64748B"/>
-                </a:solidFill>
-              </a:defRPr>
-            </a:pPr>
-            <a:r>
-              <a:t>Memangkas siklus dari rata-rata 21-25 hari menjadi 3-5 hari siap wawancara.</a:t>
-            </a:r>
-          </a:p>
-        </p:txBody>
-      </p:sp>
-      <p:sp>
-        <p:nvSpPr>
-          <p:cNvPr id="12" name="Rounded Rectangle 11"/>
-          <p:cNvSpPr/>
-          <p:nvPr/>
-        </p:nvSpPr>
-        <p:spPr>
-          <a:xfrm>
-            <a:off x="8823960" y="1645920"/>
-            <a:ext cx="2606040" cy="2011680"/>
-          </a:xfrm>
-          <a:prstGeom prst="roundRect">
-            <a:avLst/>
-          </a:prstGeom>
-          <a:solidFill>
-            <a:srgbClr val="E0F2FE"/>
-          </a:solidFill>
-          <a:ln w="12700">
-            <a:solidFill>
-              <a:srgbClr val="0EA5E9"/>
-            </a:solidFill>
-          </a:ln>
-        </p:spPr>
-        <p:style>
-          <a:lnRef idx="1">
-            <a:schemeClr val="accent1"/>
-          </a:lnRef>
-          <a:fillRef idx="3">
-            <a:schemeClr val="accent1"/>
-          </a:fillRef>
-          <a:effectRef idx="2">
-            <a:schemeClr val="accent1"/>
-          </a:effectRef>
-          <a:fontRef idx="minor">
-            <a:schemeClr val="lt1"/>
-          </a:fontRef>
-        </p:style>
-        <p:txBody>
-          <a:bodyPr rtlCol="0" anchor="ctr"/>
-          <a:lstStyle/>
-          <a:p>
-            <a:pPr algn="ctr"/>
-          </a:p>
-        </p:txBody>
-      </p:sp>
-      <p:sp>
-        <p:nvSpPr>
-          <p:cNvPr id="13" name="TextBox 12"/>
-          <p:cNvSpPr txBox="1"/>
-          <p:nvPr/>
-        </p:nvSpPr>
-        <p:spPr>
-          <a:xfrm>
-            <a:off x="8961120" y="1737360"/>
-            <a:ext cx="2331720" cy="1828800"/>
-          </a:xfrm>
-          <a:prstGeom prst="rect">
-            <a:avLst/>
-          </a:prstGeom>
-          <a:noFill/>
-        </p:spPr>
-        <p:txBody>
-          <a:bodyPr wrap="square">
-            <a:spAutoFit/>
-          </a:bodyPr>
-          <a:lstStyle/>
-          <a:p>
-            <a:pPr>
-              <a:defRPr sz="3200" b="1">
-                <a:solidFill>
-                  <a:srgbClr val="0369A1"/>
-                </a:solidFill>
-              </a:defRPr>
-            </a:pPr>
-            <a:r>
-              <a:t>100%</a:t>
-            </a:r>
-          </a:p>
-          <a:p>
-            <a:pPr>
-              <a:spcBef>
-                <a:spcPts val="400"/>
-              </a:spcBef>
-              <a:defRPr sz="1300" b="1">
-                <a:solidFill>
-                  <a:srgbClr val="0F172A"/>
-                </a:solidFill>
-              </a:defRPr>
-            </a:pPr>
-            <a:r>
-              <a:t>Objektivitas &amp; Konsistensi</a:t>
-            </a:r>
-          </a:p>
-          <a:p>
-            <a:pPr>
-              <a:spcBef>
-                <a:spcPts val="400"/>
-              </a:spcBef>
-              <a:defRPr sz="1000">
-                <a:solidFill>
-                  <a:srgbClr val="64748B"/>
-                </a:solidFill>
-              </a:defRPr>
-            </a:pPr>
-            <a:r>
-              <a:t>Standardisasi evaluasi bebas bias lelah shift kerja dan subjektivitas manusia.</a:t>
-            </a:r>
-          </a:p>
-        </p:txBody>
-      </p:sp>
-      <p:sp>
-        <p:nvSpPr>
-          <p:cNvPr id="14" name="Rounded Rectangle 13"/>
-          <p:cNvSpPr/>
-          <p:nvPr/>
-        </p:nvSpPr>
-        <p:spPr>
-          <a:xfrm>
-            <a:off x="731520" y="3931920"/>
-            <a:ext cx="10698480" cy="2286000"/>
+            <a:ext cx="5212080" cy="4572000"/>
           </a:xfrm>
           <a:prstGeom prst="roundRect">
             <a:avLst/>
@@ -10413,14 +10857,14 @@
       </p:sp>
       <p:sp>
         <p:nvSpPr>
-          <p:cNvPr id="15" name="TextBox 14"/>
+          <p:cNvPr id="7" name="TextBox 6"/>
           <p:cNvSpPr txBox="1"/>
           <p:nvPr/>
         </p:nvSpPr>
         <p:spPr>
           <a:xfrm>
-            <a:off x="1005840" y="4114800"/>
-            <a:ext cx="10149840" cy="1920240"/>
+            <a:off x="1005840" y="1828800"/>
+            <a:ext cx="4663440" cy="4114800"/>
           </a:xfrm>
           <a:prstGeom prst="rect">
             <a:avLst/>
@@ -10435,76 +10879,204 @@
           <a:p>
             <a:pPr>
               <a:spcAft>
+                <a:spcPts val="1000"/>
+              </a:spcAft>
+              <a:defRPr sz="1600" b="1">
+                <a:solidFill>
+                  <a:srgbClr val="0F172A"/>
+                </a:solidFill>
+              </a:defRPr>
+            </a:pPr>
+            <a:r>
+              <a:t>Arsitektur Produksi Skala Enterprise</a:t>
+            </a:r>
+          </a:p>
+          <a:p>
+            <a:pPr>
+              <a:spcBef>
                 <a:spcPts val="800"/>
+              </a:spcBef>
+              <a:defRPr sz="1150">
+                <a:solidFill>
+                  <a:srgbClr val="64748B"/>
+                </a:solidFill>
+              </a:defRPr>
+            </a:pPr>
+            <a:r>
+              <a:t>✔  Asynchronous Job Queue: Memanfaatkan RabbitMQ / Redis Queue / Celery untuk memproses ribuan CV secara batch tanpa membuat server web freeze.</a:t>
+            </a:r>
+          </a:p>
+          <a:p>
+            <a:pPr>
+              <a:spcBef>
+                <a:spcPts val="800"/>
+              </a:spcBef>
+              <a:defRPr sz="1150">
+                <a:solidFill>
+                  <a:srgbClr val="64748B"/>
+                </a:solidFill>
+              </a:defRPr>
+            </a:pPr>
+            <a:r>
+              <a:t>✔  Microservices Architecture: Parser service, embedding worker, dan LLM worker berjalan terpisah dalam container Docker yang mudah di-scale horizontal.</a:t>
+            </a:r>
+          </a:p>
+          <a:p>
+            <a:pPr>
+              <a:spcBef>
+                <a:spcPts val="800"/>
+              </a:spcBef>
+              <a:defRPr sz="1150">
+                <a:solidFill>
+                  <a:srgbClr val="64748B"/>
+                </a:solidFill>
+              </a:defRPr>
+            </a:pPr>
+            <a:r>
+              <a:t>✔  Vector Database Terdistribusi: Qdrant / Milvus / PGVector untuk menyimpan jutaan profil bakat pabrik dan mendukung pencarian semantik instan.</a:t>
+            </a:r>
+          </a:p>
+          <a:p>
+            <a:pPr>
+              <a:spcBef>
+                <a:spcPts val="800"/>
+              </a:spcBef>
+              <a:defRPr sz="1150">
+                <a:solidFill>
+                  <a:srgbClr val="64748B"/>
+                </a:solidFill>
+              </a:defRPr>
+            </a:pPr>
+            <a:r>
+              <a:t>✔  High-Throughput Concurrency: Mampu memproses &gt; 10.000 CV per jam saat rekrutmen massal pembukaan pabrik baru.</a:t>
+            </a:r>
+          </a:p>
+        </p:txBody>
+      </p:sp>
+      <p:sp>
+        <p:nvSpPr>
+          <p:cNvPr id="8" name="Rounded Rectangle 7"/>
+          <p:cNvSpPr/>
+          <p:nvPr/>
+        </p:nvSpPr>
+        <p:spPr>
+          <a:xfrm>
+            <a:off x="6217920" y="1645920"/>
+            <a:ext cx="5212080" cy="4572000"/>
+          </a:xfrm>
+          <a:prstGeom prst="roundRect">
+            <a:avLst/>
+          </a:prstGeom>
+          <a:solidFill>
+            <a:srgbClr val="F8FAFC"/>
+          </a:solidFill>
+          <a:ln w="12700">
+            <a:solidFill>
+              <a:srgbClr val="E2E8F0"/>
+            </a:solidFill>
+          </a:ln>
+        </p:spPr>
+        <p:style>
+          <a:lnRef idx="1">
+            <a:schemeClr val="accent1"/>
+          </a:lnRef>
+          <a:fillRef idx="3">
+            <a:schemeClr val="accent1"/>
+          </a:fillRef>
+          <a:effectRef idx="2">
+            <a:schemeClr val="accent1"/>
+          </a:effectRef>
+          <a:fontRef idx="minor">
+            <a:schemeClr val="lt1"/>
+          </a:fontRef>
+        </p:style>
+        <p:txBody>
+          <a:bodyPr rtlCol="0" anchor="ctr"/>
+          <a:lstStyle/>
+          <a:p>
+            <a:pPr algn="ctr"/>
+          </a:p>
+        </p:txBody>
+      </p:sp>
+      <p:sp>
+        <p:nvSpPr>
+          <p:cNvPr id="9" name="TextBox 8"/>
+          <p:cNvSpPr txBox="1"/>
+          <p:nvPr/>
+        </p:nvSpPr>
+        <p:spPr>
+          <a:xfrm>
+            <a:off x="6492240" y="1828800"/>
+            <a:ext cx="4663440" cy="4114800"/>
+          </a:xfrm>
+          <a:prstGeom prst="rect">
+            <a:avLst/>
+          </a:prstGeom>
+          <a:noFill/>
+        </p:spPr>
+        <p:txBody>
+          <a:bodyPr wrap="square">
+            <a:spAutoFit/>
+          </a:bodyPr>
+          <a:lstStyle/>
+          <a:p>
+            <a:pPr>
+              <a:spcAft>
+                <a:spcPts val="1000"/>
               </a:spcAft>
-              <a:defRPr sz="1400" b="1">
-                <a:solidFill>
-                  <a:srgbClr val="0F172A"/>
-                </a:solidFill>
-              </a:defRPr>
-            </a:pPr>
-            <a:r>
-              <a:t>Perbandingan Sebelum vs Sesudah Implementasi AI CV Screening</a:t>
-            </a:r>
-          </a:p>
-          <a:p>
-            <a:pPr>
-              <a:spcBef>
-                <a:spcPts val="400"/>
-              </a:spcBef>
-              <a:defRPr sz="1100">
+              <a:defRPr sz="1600" b="1">
+                <a:solidFill>
+                  <a:srgbClr val="0369A1"/>
+                </a:solidFill>
+              </a:defRPr>
+            </a:pPr>
+            <a:r>
+              <a:t>Human-in-the-Loop &amp; Adaptabilitas Pabrik</a:t>
+            </a:r>
+          </a:p>
+          <a:p>
+            <a:pPr>
+              <a:spcBef>
+                <a:spcPts val="1000"/>
+              </a:spcBef>
+              <a:defRPr sz="1150">
                 <a:solidFill>
                   <a:srgbClr val="64748B"/>
                 </a:solidFill>
               </a:defRPr>
             </a:pPr>
             <a:r>
-              <a:t>• Kapasitas Screening: Maksimal 150-200 CV per hari per recruiter  ➔  Ribuan CV diproses secara simultan dalam hitungan menit</a:t>
-            </a:r>
-          </a:p>
-          <a:p>
-            <a:pPr>
-              <a:spcBef>
-                <a:spcPts val="400"/>
-              </a:spcBef>
-              <a:defRPr sz="1100">
+              <a:t>✔  AI Sebagai Co-Pilot Cerdas: Sistem menyaring dan menyusun peringkat; keputusan final wawancara tetap berada di tangan Recruiter &amp; Line Manager.</a:t>
+            </a:r>
+          </a:p>
+          <a:p>
+            <a:pPr>
+              <a:spcBef>
+                <a:spcPts val="1000"/>
+              </a:spcBef>
+              <a:defRPr sz="1150">
                 <a:solidFill>
                   <a:srgbClr val="64748B"/>
                 </a:solidFill>
               </a:defRPr>
             </a:pPr>
             <a:r>
-              <a:t>• Risiko Bias Manusia: Tinggi (terpengaruh foto, gender, nama, almamater)  ➔  Nol pada tahap AI (Blind Screening berbasis kompetensi)</a:t>
-            </a:r>
-          </a:p>
-          <a:p>
-            <a:pPr>
-              <a:spcBef>
-                <a:spcPts val="400"/>
-              </a:spcBef>
-              <a:defRPr sz="1100">
+              <a:t>✔  Dukungan Ragam Posisi Manufaktur: Fleksibel mengevaluasi Plant CAD Drafter, Automation Engineer, PLC Specialist, Operator Produksi, hingga Staff PPIC &amp; QC.</a:t>
+            </a:r>
+          </a:p>
+          <a:p>
+            <a:pPr>
+              <a:spcBef>
+                <a:spcPts val="1000"/>
+              </a:spcBef>
+              <a:defRPr sz="1150">
                 <a:solidFill>
                   <a:srgbClr val="64748B"/>
                 </a:solidFill>
               </a:defRPr>
             </a:pPr>
             <a:r>
-              <a:t>• Auditability &amp; Keterbukaan: Subjektif, tidak ada rekaman alasan penolakan detail  ➔  100% transparan dengan Strengths, Gaps, dan Reasoning</a:t>
-            </a:r>
-          </a:p>
-          <a:p>
-            <a:pPr>
-              <a:spcBef>
-                <a:spcPts val="400"/>
-              </a:spcBef>
-              <a:defRPr sz="1100">
-                <a:solidFill>
-                  <a:srgbClr val="64748B"/>
-                </a:solidFill>
-              </a:defRPr>
-            </a:pPr>
-            <a:r>
-              <a:t>• Dampak pada Operasional Pabrik: Kekurangan operator &amp; drafter memperlambat shift  ➔  Pemenuhan man-power tepat waktu, zero production downtime</a:t>
+              <a:t>✔  Integrasi HRIS &amp; Mesin Presensi: REST API mudah disambungkan ke HRIS internal pabrik untuk penjadwalan wawancara dan onboarding otomatis.</a:t>
             </a:r>
           </a:p>
         </p:txBody>
